--- a/lecture_2/Lecture_2.pptx
+++ b/lecture_2/Lecture_2.pptx
@@ -5,7 +5,7 @@
     <p:sldMasterId id="2147483968" r:id="rId1"/>
   </p:sldMasterIdLst>
   <p:notesMasterIdLst>
-    <p:notesMasterId r:id="rId27"/>
+    <p:notesMasterId r:id="rId26"/>
   </p:notesMasterIdLst>
   <p:sldIdLst>
     <p:sldId id="256" r:id="rId2"/>
@@ -13,26 +13,25 @@
     <p:sldId id="291" r:id="rId4"/>
     <p:sldId id="293" r:id="rId5"/>
     <p:sldId id="292" r:id="rId6"/>
-    <p:sldId id="286" r:id="rId7"/>
-    <p:sldId id="277" r:id="rId8"/>
-    <p:sldId id="260" r:id="rId9"/>
-    <p:sldId id="261" r:id="rId10"/>
-    <p:sldId id="281" r:id="rId11"/>
-    <p:sldId id="265" r:id="rId12"/>
-    <p:sldId id="282" r:id="rId13"/>
-    <p:sldId id="266" r:id="rId14"/>
-    <p:sldId id="283" r:id="rId15"/>
-    <p:sldId id="284" r:id="rId16"/>
-    <p:sldId id="290" r:id="rId17"/>
-    <p:sldId id="288" r:id="rId18"/>
-    <p:sldId id="298" r:id="rId19"/>
-    <p:sldId id="299" r:id="rId20"/>
-    <p:sldId id="287" r:id="rId21"/>
-    <p:sldId id="294" r:id="rId22"/>
-    <p:sldId id="295" r:id="rId23"/>
-    <p:sldId id="300" r:id="rId24"/>
-    <p:sldId id="301" r:id="rId25"/>
-    <p:sldId id="280" r:id="rId26"/>
+    <p:sldId id="277" r:id="rId7"/>
+    <p:sldId id="260" r:id="rId8"/>
+    <p:sldId id="261" r:id="rId9"/>
+    <p:sldId id="281" r:id="rId10"/>
+    <p:sldId id="265" r:id="rId11"/>
+    <p:sldId id="282" r:id="rId12"/>
+    <p:sldId id="266" r:id="rId13"/>
+    <p:sldId id="283" r:id="rId14"/>
+    <p:sldId id="284" r:id="rId15"/>
+    <p:sldId id="290" r:id="rId16"/>
+    <p:sldId id="288" r:id="rId17"/>
+    <p:sldId id="298" r:id="rId18"/>
+    <p:sldId id="299" r:id="rId19"/>
+    <p:sldId id="287" r:id="rId20"/>
+    <p:sldId id="294" r:id="rId21"/>
+    <p:sldId id="295" r:id="rId22"/>
+    <p:sldId id="300" r:id="rId23"/>
+    <p:sldId id="301" r:id="rId24"/>
+    <p:sldId id="280" r:id="rId25"/>
   </p:sldIdLst>
   <p:sldSz cx="12192000" cy="6858000"/>
   <p:notesSz cx="6858000" cy="9144000"/>
@@ -221,7 +220,7 @@
           <a:p>
             <a:fld id="{870534A9-6018-2047-913D-1953A2F6D512}" type="datetimeFigureOut">
               <a:rPr lang="en-US" smtClean="0"/>
-              <a:t>12/27/2021</a:t>
+              <a:t>12/28/2021</a:t>
             </a:fld>
             <a:endParaRPr lang="en-US"/>
           </a:p>
@@ -637,7 +636,7 @@
           <a:p>
             <a:fld id="{70AE8F9F-6DA5-A84A-A6AC-9F6E4BC07FF0}" type="slidenum">
               <a:rPr lang="en-US" smtClean="0"/>
-              <a:t>25</a:t>
+              <a:t>24</a:t>
             </a:fld>
             <a:endParaRPr lang="en-US"/>
           </a:p>
@@ -713,7 +712,7 @@
           <a:noFill/>
           <a:extLst>
             <a:ext uri="{909E8E84-426E-40dd-AFC4-6F175D3DCCD1}">
-              <a14:hiddenFill xmlns="" xmlns:a14="http://schemas.microsoft.com/office/drawing/2010/main">
+              <a14:hiddenFill xmlns:a14="http://schemas.microsoft.com/office/drawing/2010/main" xmlns="">
                 <a:solidFill>
                   <a:srgbClr val="FFFFFF"/>
                 </a:solidFill>
@@ -772,7 +771,7 @@
             </a:ln>
             <a:extLst>
               <a:ext uri="{91240B29-F687-4f45-9708-019B960494DF}">
-                <a14:hiddenLine xmlns="" xmlns:a14="http://schemas.microsoft.com/office/drawing/2010/main" w="9525">
+                <a14:hiddenLine xmlns:a14="http://schemas.microsoft.com/office/drawing/2010/main" xmlns="" w="9525">
                   <a:solidFill>
                     <a:srgbClr val="000000"/>
                   </a:solidFill>
@@ -862,7 +861,7 @@
             </a:ln>
             <a:extLst>
               <a:ext uri="{91240B29-F687-4f45-9708-019B960494DF}">
-                <a14:hiddenLine xmlns="" xmlns:a14="http://schemas.microsoft.com/office/drawing/2010/main" w="9525">
+                <a14:hiddenLine xmlns:a14="http://schemas.microsoft.com/office/drawing/2010/main" xmlns="" w="9525">
                   <a:solidFill>
                     <a:srgbClr val="000000"/>
                   </a:solidFill>
@@ -952,7 +951,7 @@
             </a:ln>
             <a:extLst>
               <a:ext uri="{91240B29-F687-4f45-9708-019B960494DF}">
-                <a14:hiddenLine xmlns="" xmlns:a14="http://schemas.microsoft.com/office/drawing/2010/main" w="9525">
+                <a14:hiddenLine xmlns:a14="http://schemas.microsoft.com/office/drawing/2010/main" xmlns="" w="9525">
                   <a:solidFill>
                     <a:srgbClr val="000000"/>
                   </a:solidFill>
@@ -986,7 +985,7 @@
             </a:ln>
             <a:extLst>
               <a:ext uri="{91240B29-F687-4f45-9708-019B960494DF}">
-                <a14:hiddenLine xmlns="" xmlns:a14="http://schemas.microsoft.com/office/drawing/2010/main" w="9525">
+                <a14:hiddenLine xmlns:a14="http://schemas.microsoft.com/office/drawing/2010/main" xmlns="" w="9525">
                   <a:solidFill>
                     <a:srgbClr val="000000"/>
                   </a:solidFill>
@@ -1076,7 +1075,7 @@
             </a:ln>
             <a:extLst>
               <a:ext uri="{91240B29-F687-4f45-9708-019B960494DF}">
-                <a14:hiddenLine xmlns="" xmlns:a14="http://schemas.microsoft.com/office/drawing/2010/main" w="9525">
+                <a14:hiddenLine xmlns:a14="http://schemas.microsoft.com/office/drawing/2010/main" xmlns="" w="9525">
                   <a:solidFill>
                     <a:srgbClr val="000000"/>
                   </a:solidFill>
@@ -1138,7 +1137,7 @@
             </a:ln>
             <a:extLst>
               <a:ext uri="{91240B29-F687-4f45-9708-019B960494DF}">
-                <a14:hiddenLine xmlns="" xmlns:a14="http://schemas.microsoft.com/office/drawing/2010/main" w="9525">
+                <a14:hiddenLine xmlns:a14="http://schemas.microsoft.com/office/drawing/2010/main" xmlns="" w="9525">
                   <a:solidFill>
                     <a:srgbClr val="000000"/>
                   </a:solidFill>
@@ -1200,7 +1199,7 @@
             </a:ln>
             <a:extLst>
               <a:ext uri="{91240B29-F687-4f45-9708-019B960494DF}">
-                <a14:hiddenLine xmlns="" xmlns:a14="http://schemas.microsoft.com/office/drawing/2010/main" w="9525">
+                <a14:hiddenLine xmlns:a14="http://schemas.microsoft.com/office/drawing/2010/main" xmlns="" w="9525">
                   <a:solidFill>
                     <a:srgbClr val="000000"/>
                   </a:solidFill>
@@ -1290,7 +1289,7 @@
             </a:ln>
             <a:extLst>
               <a:ext uri="{91240B29-F687-4f45-9708-019B960494DF}">
-                <a14:hiddenLine xmlns="" xmlns:a14="http://schemas.microsoft.com/office/drawing/2010/main" w="9525">
+                <a14:hiddenLine xmlns:a14="http://schemas.microsoft.com/office/drawing/2010/main" xmlns="" w="9525">
                   <a:solidFill>
                     <a:srgbClr val="000000"/>
                   </a:solidFill>
@@ -1352,7 +1351,7 @@
             </a:ln>
             <a:extLst>
               <a:ext uri="{91240B29-F687-4f45-9708-019B960494DF}">
-                <a14:hiddenLine xmlns="" xmlns:a14="http://schemas.microsoft.com/office/drawing/2010/main" w="9525">
+                <a14:hiddenLine xmlns:a14="http://schemas.microsoft.com/office/drawing/2010/main" xmlns="" w="9525">
                   <a:solidFill>
                     <a:srgbClr val="000000"/>
                   </a:solidFill>
@@ -1414,7 +1413,7 @@
             </a:ln>
             <a:extLst>
               <a:ext uri="{91240B29-F687-4f45-9708-019B960494DF}">
-                <a14:hiddenLine xmlns="" xmlns:a14="http://schemas.microsoft.com/office/drawing/2010/main" w="9525">
+                <a14:hiddenLine xmlns:a14="http://schemas.microsoft.com/office/drawing/2010/main" xmlns="" w="9525">
                   <a:solidFill>
                     <a:srgbClr val="000000"/>
                   </a:solidFill>
@@ -1504,7 +1503,7 @@
             </a:ln>
             <a:extLst>
               <a:ext uri="{91240B29-F687-4f45-9708-019B960494DF}">
-                <a14:hiddenLine xmlns="" xmlns:a14="http://schemas.microsoft.com/office/drawing/2010/main" w="9525">
+                <a14:hiddenLine xmlns:a14="http://schemas.microsoft.com/office/drawing/2010/main" xmlns="" w="9525">
                   <a:solidFill>
                     <a:srgbClr val="000000"/>
                   </a:solidFill>
@@ -1594,7 +1593,7 @@
             </a:ln>
             <a:extLst>
               <a:ext uri="{91240B29-F687-4f45-9708-019B960494DF}">
-                <a14:hiddenLine xmlns="" xmlns:a14="http://schemas.microsoft.com/office/drawing/2010/main" w="9525">
+                <a14:hiddenLine xmlns:a14="http://schemas.microsoft.com/office/drawing/2010/main" xmlns="" w="9525">
                   <a:solidFill>
                     <a:srgbClr val="000000"/>
                   </a:solidFill>
@@ -1656,7 +1655,7 @@
             </a:ln>
             <a:extLst>
               <a:ext uri="{91240B29-F687-4f45-9708-019B960494DF}">
-                <a14:hiddenLine xmlns="" xmlns:a14="http://schemas.microsoft.com/office/drawing/2010/main" w="9525">
+                <a14:hiddenLine xmlns:a14="http://schemas.microsoft.com/office/drawing/2010/main" xmlns="" w="9525">
                   <a:solidFill>
                     <a:srgbClr val="000000"/>
                   </a:solidFill>
@@ -1766,7 +1765,7 @@
             </a:ln>
             <a:extLst>
               <a:ext uri="{91240B29-F687-4f45-9708-019B960494DF}">
-                <a14:hiddenLine xmlns="" xmlns:a14="http://schemas.microsoft.com/office/drawing/2010/main" w="9525">
+                <a14:hiddenLine xmlns:a14="http://schemas.microsoft.com/office/drawing/2010/main" xmlns="" w="9525">
                   <a:solidFill>
                     <a:srgbClr val="000000"/>
                   </a:solidFill>
@@ -1828,7 +1827,7 @@
             </a:ln>
             <a:extLst>
               <a:ext uri="{91240B29-F687-4f45-9708-019B960494DF}">
-                <a14:hiddenLine xmlns="" xmlns:a14="http://schemas.microsoft.com/office/drawing/2010/main" w="9525">
+                <a14:hiddenLine xmlns:a14="http://schemas.microsoft.com/office/drawing/2010/main" xmlns="" w="9525">
                   <a:solidFill>
                     <a:srgbClr val="000000"/>
                   </a:solidFill>
@@ -1918,7 +1917,7 @@
             </a:ln>
             <a:extLst>
               <a:ext uri="{91240B29-F687-4f45-9708-019B960494DF}">
-                <a14:hiddenLine xmlns="" xmlns:a14="http://schemas.microsoft.com/office/drawing/2010/main" w="9525">
+                <a14:hiddenLine xmlns:a14="http://schemas.microsoft.com/office/drawing/2010/main" xmlns="" w="9525">
                   <a:solidFill>
                     <a:srgbClr val="000000"/>
                   </a:solidFill>
@@ -2008,7 +2007,7 @@
             </a:ln>
             <a:extLst>
               <a:ext uri="{91240B29-F687-4f45-9708-019B960494DF}">
-                <a14:hiddenLine xmlns="" xmlns:a14="http://schemas.microsoft.com/office/drawing/2010/main" w="9525">
+                <a14:hiddenLine xmlns:a14="http://schemas.microsoft.com/office/drawing/2010/main" xmlns="" w="9525">
                   <a:solidFill>
                     <a:srgbClr val="000000"/>
                   </a:solidFill>
@@ -2070,7 +2069,7 @@
             </a:ln>
             <a:extLst>
               <a:ext uri="{91240B29-F687-4f45-9708-019B960494DF}">
-                <a14:hiddenLine xmlns="" xmlns:a14="http://schemas.microsoft.com/office/drawing/2010/main" w="9525">
+                <a14:hiddenLine xmlns:a14="http://schemas.microsoft.com/office/drawing/2010/main" xmlns="" w="9525">
                   <a:solidFill>
                     <a:srgbClr val="000000"/>
                   </a:solidFill>
@@ -2160,7 +2159,7 @@
             </a:ln>
             <a:extLst>
               <a:ext uri="{91240B29-F687-4f45-9708-019B960494DF}">
-                <a14:hiddenLine xmlns="" xmlns:a14="http://schemas.microsoft.com/office/drawing/2010/main" w="9525">
+                <a14:hiddenLine xmlns:a14="http://schemas.microsoft.com/office/drawing/2010/main" xmlns="" w="9525">
                   <a:solidFill>
                     <a:srgbClr val="000000"/>
                   </a:solidFill>
@@ -2250,7 +2249,7 @@
             </a:ln>
             <a:extLst>
               <a:ext uri="{91240B29-F687-4f45-9708-019B960494DF}">
-                <a14:hiddenLine xmlns="" xmlns:a14="http://schemas.microsoft.com/office/drawing/2010/main" w="9525">
+                <a14:hiddenLine xmlns:a14="http://schemas.microsoft.com/office/drawing/2010/main" xmlns="" w="9525">
                   <a:solidFill>
                     <a:srgbClr val="000000"/>
                   </a:solidFill>
@@ -2306,7 +2305,7 @@
             </a:ln>
             <a:extLst>
               <a:ext uri="{91240B29-F687-4f45-9708-019B960494DF}">
-                <a14:hiddenLine xmlns="" xmlns:a14="http://schemas.microsoft.com/office/drawing/2010/main" w="9525">
+                <a14:hiddenLine xmlns:a14="http://schemas.microsoft.com/office/drawing/2010/main" xmlns="" w="9525">
                   <a:solidFill>
                     <a:srgbClr val="000000"/>
                   </a:solidFill>
@@ -2396,7 +2395,7 @@
             </a:ln>
             <a:extLst>
               <a:ext uri="{91240B29-F687-4f45-9708-019B960494DF}">
-                <a14:hiddenLine xmlns="" xmlns:a14="http://schemas.microsoft.com/office/drawing/2010/main" w="9525">
+                <a14:hiddenLine xmlns:a14="http://schemas.microsoft.com/office/drawing/2010/main" xmlns="" w="9525">
                   <a:solidFill>
                     <a:srgbClr val="000000"/>
                   </a:solidFill>
@@ -2452,7 +2451,7 @@
             </a:ln>
             <a:extLst>
               <a:ext uri="{91240B29-F687-4f45-9708-019B960494DF}">
-                <a14:hiddenLine xmlns="" xmlns:a14="http://schemas.microsoft.com/office/drawing/2010/main" w="9525">
+                <a14:hiddenLine xmlns:a14="http://schemas.microsoft.com/office/drawing/2010/main" xmlns="" w="9525">
                   <a:solidFill>
                     <a:srgbClr val="000000"/>
                   </a:solidFill>
@@ -2542,7 +2541,7 @@
             </a:ln>
             <a:extLst>
               <a:ext uri="{91240B29-F687-4f45-9708-019B960494DF}">
-                <a14:hiddenLine xmlns="" xmlns:a14="http://schemas.microsoft.com/office/drawing/2010/main" w="9525">
+                <a14:hiddenLine xmlns:a14="http://schemas.microsoft.com/office/drawing/2010/main" xmlns="" w="9525">
                   <a:solidFill>
                     <a:srgbClr val="000000"/>
                   </a:solidFill>
@@ -2610,7 +2609,7 @@
             </a:ln>
             <a:extLst>
               <a:ext uri="{91240B29-F687-4f45-9708-019B960494DF}">
-                <a14:hiddenLine xmlns="" xmlns:a14="http://schemas.microsoft.com/office/drawing/2010/main" w="9525">
+                <a14:hiddenLine xmlns:a14="http://schemas.microsoft.com/office/drawing/2010/main" xmlns="" w="9525">
                   <a:solidFill>
                     <a:srgbClr val="000000"/>
                   </a:solidFill>
@@ -2700,7 +2699,7 @@
             </a:ln>
             <a:extLst>
               <a:ext uri="{91240B29-F687-4f45-9708-019B960494DF}">
-                <a14:hiddenLine xmlns="" xmlns:a14="http://schemas.microsoft.com/office/drawing/2010/main" w="9525">
+                <a14:hiddenLine xmlns:a14="http://schemas.microsoft.com/office/drawing/2010/main" xmlns="" w="9525">
                   <a:solidFill>
                     <a:srgbClr val="000000"/>
                   </a:solidFill>
@@ -2768,7 +2767,7 @@
             </a:ln>
             <a:extLst>
               <a:ext uri="{91240B29-F687-4f45-9708-019B960494DF}">
-                <a14:hiddenLine xmlns="" xmlns:a14="http://schemas.microsoft.com/office/drawing/2010/main" w="9525">
+                <a14:hiddenLine xmlns:a14="http://schemas.microsoft.com/office/drawing/2010/main" xmlns="" w="9525">
                   <a:solidFill>
                     <a:srgbClr val="000000"/>
                   </a:solidFill>
@@ -2858,7 +2857,7 @@
             </a:ln>
             <a:extLst>
               <a:ext uri="{91240B29-F687-4f45-9708-019B960494DF}">
-                <a14:hiddenLine xmlns="" xmlns:a14="http://schemas.microsoft.com/office/drawing/2010/main" w="9525">
+                <a14:hiddenLine xmlns:a14="http://schemas.microsoft.com/office/drawing/2010/main" xmlns="" w="9525">
                   <a:solidFill>
                     <a:srgbClr val="000000"/>
                   </a:solidFill>
@@ -2892,7 +2891,7 @@
             </a:ln>
             <a:extLst>
               <a:ext uri="{91240B29-F687-4f45-9708-019B960494DF}">
-                <a14:hiddenLine xmlns="" xmlns:a14="http://schemas.microsoft.com/office/drawing/2010/main" w="9525">
+                <a14:hiddenLine xmlns:a14="http://schemas.microsoft.com/office/drawing/2010/main" xmlns="" w="9525">
                   <a:solidFill>
                     <a:srgbClr val="000000"/>
                   </a:solidFill>
@@ -2982,7 +2981,7 @@
             </a:ln>
             <a:extLst>
               <a:ext uri="{91240B29-F687-4f45-9708-019B960494DF}">
-                <a14:hiddenLine xmlns="" xmlns:a14="http://schemas.microsoft.com/office/drawing/2010/main" w="9525">
+                <a14:hiddenLine xmlns:a14="http://schemas.microsoft.com/office/drawing/2010/main" xmlns="" w="9525">
                   <a:solidFill>
                     <a:srgbClr val="000000"/>
                   </a:solidFill>
@@ -3044,7 +3043,7 @@
             </a:ln>
             <a:extLst>
               <a:ext uri="{91240B29-F687-4f45-9708-019B960494DF}">
-                <a14:hiddenLine xmlns="" xmlns:a14="http://schemas.microsoft.com/office/drawing/2010/main" w="9525">
+                <a14:hiddenLine xmlns:a14="http://schemas.microsoft.com/office/drawing/2010/main" xmlns="" w="9525">
                   <a:solidFill>
                     <a:srgbClr val="000000"/>
                   </a:solidFill>
@@ -3106,7 +3105,7 @@
             </a:ln>
             <a:extLst>
               <a:ext uri="{91240B29-F687-4f45-9708-019B960494DF}">
-                <a14:hiddenLine xmlns="" xmlns:a14="http://schemas.microsoft.com/office/drawing/2010/main" w="9525">
+                <a14:hiddenLine xmlns:a14="http://schemas.microsoft.com/office/drawing/2010/main" xmlns="" w="9525">
                   <a:solidFill>
                     <a:srgbClr val="000000"/>
                   </a:solidFill>
@@ -3196,7 +3195,7 @@
             </a:ln>
             <a:extLst>
               <a:ext uri="{91240B29-F687-4f45-9708-019B960494DF}">
-                <a14:hiddenLine xmlns="" xmlns:a14="http://schemas.microsoft.com/office/drawing/2010/main" w="9525">
+                <a14:hiddenLine xmlns:a14="http://schemas.microsoft.com/office/drawing/2010/main" xmlns="" w="9525">
                   <a:solidFill>
                     <a:srgbClr val="000000"/>
                   </a:solidFill>
@@ -3264,7 +3263,7 @@
             </a:ln>
             <a:extLst>
               <a:ext uri="{91240B29-F687-4f45-9708-019B960494DF}">
-                <a14:hiddenLine xmlns="" xmlns:a14="http://schemas.microsoft.com/office/drawing/2010/main" w="9525">
+                <a14:hiddenLine xmlns:a14="http://schemas.microsoft.com/office/drawing/2010/main" xmlns="" w="9525">
                   <a:solidFill>
                     <a:srgbClr val="000000"/>
                   </a:solidFill>
@@ -3326,7 +3325,7 @@
             </a:ln>
             <a:extLst>
               <a:ext uri="{91240B29-F687-4f45-9708-019B960494DF}">
-                <a14:hiddenLine xmlns="" xmlns:a14="http://schemas.microsoft.com/office/drawing/2010/main" w="9525">
+                <a14:hiddenLine xmlns:a14="http://schemas.microsoft.com/office/drawing/2010/main" xmlns="" w="9525">
                   <a:solidFill>
                     <a:srgbClr val="000000"/>
                   </a:solidFill>
@@ -3416,7 +3415,7 @@
             </a:ln>
             <a:extLst>
               <a:ext uri="{91240B29-F687-4f45-9708-019B960494DF}">
-                <a14:hiddenLine xmlns="" xmlns:a14="http://schemas.microsoft.com/office/drawing/2010/main" w="9525">
+                <a14:hiddenLine xmlns:a14="http://schemas.microsoft.com/office/drawing/2010/main" xmlns="" w="9525">
                   <a:solidFill>
                     <a:srgbClr val="000000"/>
                   </a:solidFill>
@@ -3478,7 +3477,7 @@
             </a:ln>
             <a:extLst>
               <a:ext uri="{91240B29-F687-4f45-9708-019B960494DF}">
-                <a14:hiddenLine xmlns="" xmlns:a14="http://schemas.microsoft.com/office/drawing/2010/main" w="9525">
+                <a14:hiddenLine xmlns:a14="http://schemas.microsoft.com/office/drawing/2010/main" xmlns="" w="9525">
                   <a:solidFill>
                     <a:srgbClr val="000000"/>
                   </a:solidFill>
@@ -3568,7 +3567,7 @@
             </a:ln>
             <a:extLst>
               <a:ext uri="{91240B29-F687-4f45-9708-019B960494DF}">
-                <a14:hiddenLine xmlns="" xmlns:a14="http://schemas.microsoft.com/office/drawing/2010/main" w="9525">
+                <a14:hiddenLine xmlns:a14="http://schemas.microsoft.com/office/drawing/2010/main" xmlns="" w="9525">
                   <a:solidFill>
                     <a:srgbClr val="000000"/>
                   </a:solidFill>
@@ -3630,7 +3629,7 @@
             </a:ln>
             <a:extLst>
               <a:ext uri="{91240B29-F687-4f45-9708-019B960494DF}">
-                <a14:hiddenLine xmlns="" xmlns:a14="http://schemas.microsoft.com/office/drawing/2010/main" w="9525">
+                <a14:hiddenLine xmlns:a14="http://schemas.microsoft.com/office/drawing/2010/main" xmlns="" w="9525">
                   <a:solidFill>
                     <a:srgbClr val="000000"/>
                   </a:solidFill>
@@ -3720,7 +3719,7 @@
             </a:ln>
             <a:extLst>
               <a:ext uri="{91240B29-F687-4f45-9708-019B960494DF}">
-                <a14:hiddenLine xmlns="" xmlns:a14="http://schemas.microsoft.com/office/drawing/2010/main" w="9525">
+                <a14:hiddenLine xmlns:a14="http://schemas.microsoft.com/office/drawing/2010/main" xmlns="" w="9525">
                   <a:solidFill>
                     <a:srgbClr val="000000"/>
                   </a:solidFill>
@@ -3754,7 +3753,7 @@
             </a:ln>
             <a:extLst>
               <a:ext uri="{91240B29-F687-4f45-9708-019B960494DF}">
-                <a14:hiddenLine xmlns="" xmlns:a14="http://schemas.microsoft.com/office/drawing/2010/main" w="9525">
+                <a14:hiddenLine xmlns:a14="http://schemas.microsoft.com/office/drawing/2010/main" xmlns="" w="9525">
                   <a:solidFill>
                     <a:srgbClr val="000000"/>
                   </a:solidFill>
@@ -3819,7 +3818,7 @@
             </a:ln>
             <a:extLst>
               <a:ext uri="{91240B29-F687-4f45-9708-019B960494DF}">
-                <a14:hiddenLine xmlns="" xmlns:a14="http://schemas.microsoft.com/office/drawing/2010/main" w="9525">
+                <a14:hiddenLine xmlns:a14="http://schemas.microsoft.com/office/drawing/2010/main" xmlns="" w="9525">
                   <a:solidFill>
                     <a:srgbClr val="000000"/>
                   </a:solidFill>
@@ -3909,7 +3908,7 @@
             </a:ln>
             <a:extLst>
               <a:ext uri="{91240B29-F687-4f45-9708-019B960494DF}">
-                <a14:hiddenLine xmlns="" xmlns:a14="http://schemas.microsoft.com/office/drawing/2010/main" w="9525">
+                <a14:hiddenLine xmlns:a14="http://schemas.microsoft.com/office/drawing/2010/main" xmlns="" w="9525">
                   <a:solidFill>
                     <a:srgbClr val="000000"/>
                   </a:solidFill>
@@ -3971,7 +3970,7 @@
             </a:ln>
             <a:extLst>
               <a:ext uri="{91240B29-F687-4f45-9708-019B960494DF}">
-                <a14:hiddenLine xmlns="" xmlns:a14="http://schemas.microsoft.com/office/drawing/2010/main" w="9525">
+                <a14:hiddenLine xmlns:a14="http://schemas.microsoft.com/office/drawing/2010/main" xmlns="" w="9525">
                   <a:solidFill>
                     <a:srgbClr val="000000"/>
                   </a:solidFill>
@@ -4061,7 +4060,7 @@
             </a:ln>
             <a:extLst>
               <a:ext uri="{91240B29-F687-4f45-9708-019B960494DF}">
-                <a14:hiddenLine xmlns="" xmlns:a14="http://schemas.microsoft.com/office/drawing/2010/main" w="9525">
+                <a14:hiddenLine xmlns:a14="http://schemas.microsoft.com/office/drawing/2010/main" xmlns="" w="9525">
                   <a:solidFill>
                     <a:srgbClr val="000000"/>
                   </a:solidFill>
@@ -4151,7 +4150,7 @@
             </a:ln>
             <a:extLst>
               <a:ext uri="{91240B29-F687-4f45-9708-019B960494DF}">
-                <a14:hiddenLine xmlns="" xmlns:a14="http://schemas.microsoft.com/office/drawing/2010/main" w="9525">
+                <a14:hiddenLine xmlns:a14="http://schemas.microsoft.com/office/drawing/2010/main" xmlns="" w="9525">
                   <a:solidFill>
                     <a:srgbClr val="000000"/>
                   </a:solidFill>
@@ -4216,7 +4215,7 @@
             </a:ln>
             <a:extLst>
               <a:ext uri="{91240B29-F687-4f45-9708-019B960494DF}">
-                <a14:hiddenLine xmlns="" xmlns:a14="http://schemas.microsoft.com/office/drawing/2010/main" w="9525">
+                <a14:hiddenLine xmlns:a14="http://schemas.microsoft.com/office/drawing/2010/main" xmlns="" w="9525">
                   <a:solidFill>
                     <a:srgbClr val="000000"/>
                   </a:solidFill>
@@ -4278,7 +4277,7 @@
             </a:ln>
             <a:extLst>
               <a:ext uri="{91240B29-F687-4f45-9708-019B960494DF}">
-                <a14:hiddenLine xmlns="" xmlns:a14="http://schemas.microsoft.com/office/drawing/2010/main" w="9525">
+                <a14:hiddenLine xmlns:a14="http://schemas.microsoft.com/office/drawing/2010/main" xmlns="" w="9525">
                   <a:solidFill>
                     <a:srgbClr val="000000"/>
                   </a:solidFill>
@@ -4368,7 +4367,7 @@
             </a:ln>
             <a:extLst>
               <a:ext uri="{91240B29-F687-4f45-9708-019B960494DF}">
-                <a14:hiddenLine xmlns="" xmlns:a14="http://schemas.microsoft.com/office/drawing/2010/main" w="9525">
+                <a14:hiddenLine xmlns:a14="http://schemas.microsoft.com/office/drawing/2010/main" xmlns="" w="9525">
                   <a:solidFill>
                     <a:srgbClr val="000000"/>
                   </a:solidFill>
@@ -4458,7 +4457,7 @@
             </a:ln>
             <a:extLst>
               <a:ext uri="{91240B29-F687-4f45-9708-019B960494DF}">
-                <a14:hiddenLine xmlns="" xmlns:a14="http://schemas.microsoft.com/office/drawing/2010/main" w="9525">
+                <a14:hiddenLine xmlns:a14="http://schemas.microsoft.com/office/drawing/2010/main" xmlns="" w="9525">
                   <a:solidFill>
                     <a:srgbClr val="000000"/>
                   </a:solidFill>
@@ -4520,7 +4519,7 @@
             </a:ln>
             <a:extLst>
               <a:ext uri="{91240B29-F687-4f45-9708-019B960494DF}">
-                <a14:hiddenLine xmlns="" xmlns:a14="http://schemas.microsoft.com/office/drawing/2010/main" w="9525">
+                <a14:hiddenLine xmlns:a14="http://schemas.microsoft.com/office/drawing/2010/main" xmlns="" w="9525">
                   <a:solidFill>
                     <a:srgbClr val="000000"/>
                   </a:solidFill>
@@ -4640,7 +4639,7 @@
             </a:ln>
             <a:extLst>
               <a:ext uri="{91240B29-F687-4f45-9708-019B960494DF}">
-                <a14:hiddenLine xmlns="" xmlns:a14="http://schemas.microsoft.com/office/drawing/2010/main" w="9525">
+                <a14:hiddenLine xmlns:a14="http://schemas.microsoft.com/office/drawing/2010/main" xmlns="" w="9525">
                   <a:solidFill>
                     <a:srgbClr val="000000"/>
                   </a:solidFill>
@@ -4708,7 +4707,7 @@
             </a:ln>
             <a:extLst>
               <a:ext uri="{91240B29-F687-4f45-9708-019B960494DF}">
-                <a14:hiddenLine xmlns="" xmlns:a14="http://schemas.microsoft.com/office/drawing/2010/main" w="9525">
+                <a14:hiddenLine xmlns:a14="http://schemas.microsoft.com/office/drawing/2010/main" xmlns="" w="9525">
                   <a:solidFill>
                     <a:srgbClr val="000000"/>
                   </a:solidFill>
@@ -4798,7 +4797,7 @@
             </a:ln>
             <a:extLst>
               <a:ext uri="{91240B29-F687-4f45-9708-019B960494DF}">
-                <a14:hiddenLine xmlns="" xmlns:a14="http://schemas.microsoft.com/office/drawing/2010/main" w="9525">
+                <a14:hiddenLine xmlns:a14="http://schemas.microsoft.com/office/drawing/2010/main" xmlns="" w="9525">
                   <a:solidFill>
                     <a:srgbClr val="000000"/>
                   </a:solidFill>
@@ -4938,7 +4937,7 @@
           <a:p>
             <a:fld id="{B3A65DBF-A9F0-C148-993C-2303F706A4CD}" type="datetimeFigureOut">
               <a:rPr lang="en-US" smtClean="0"/>
-              <a:t>12/27/2021</a:t>
+              <a:t>12/28/2021</a:t>
             </a:fld>
             <a:endParaRPr lang="en-US"/>
           </a:p>
@@ -5205,7 +5204,7 @@
           <a:p>
             <a:fld id="{B3A65DBF-A9F0-C148-993C-2303F706A4CD}" type="datetimeFigureOut">
               <a:rPr lang="en-US" smtClean="0"/>
-              <a:t>12/27/2021</a:t>
+              <a:t>12/28/2021</a:t>
             </a:fld>
             <a:endParaRPr lang="en-US"/>
           </a:p>
@@ -5401,7 +5400,7 @@
           <a:p>
             <a:fld id="{B3A65DBF-A9F0-C148-993C-2303F706A4CD}" type="datetimeFigureOut">
               <a:rPr lang="en-US" smtClean="0"/>
-              <a:t>12/27/2021</a:t>
+              <a:t>12/28/2021</a:t>
             </a:fld>
             <a:endParaRPr lang="en-US"/>
           </a:p>
@@ -5664,7 +5663,7 @@
           <a:p>
             <a:fld id="{B3A65DBF-A9F0-C148-993C-2303F706A4CD}" type="datetimeFigureOut">
               <a:rPr lang="en-US" smtClean="0"/>
-              <a:t>12/27/2021</a:t>
+              <a:t>12/28/2021</a:t>
             </a:fld>
             <a:endParaRPr lang="en-US"/>
           </a:p>
@@ -6098,7 +6097,7 @@
           <a:p>
             <a:fld id="{B3A65DBF-A9F0-C148-993C-2303F706A4CD}" type="datetimeFigureOut">
               <a:rPr lang="en-US" smtClean="0"/>
-              <a:t>12/27/2021</a:t>
+              <a:t>12/28/2021</a:t>
             </a:fld>
             <a:endParaRPr lang="en-US"/>
           </a:p>
@@ -6644,7 +6643,7 @@
           <a:p>
             <a:fld id="{B3A65DBF-A9F0-C148-993C-2303F706A4CD}" type="datetimeFigureOut">
               <a:rPr lang="en-US" smtClean="0"/>
-              <a:t>12/27/2021</a:t>
+              <a:t>12/28/2021</a:t>
             </a:fld>
             <a:endParaRPr lang="en-US"/>
           </a:p>
@@ -7364,7 +7363,7 @@
           <a:p>
             <a:fld id="{B3A65DBF-A9F0-C148-993C-2303F706A4CD}" type="datetimeFigureOut">
               <a:rPr lang="en-US" smtClean="0"/>
-              <a:t>12/27/2021</a:t>
+              <a:t>12/28/2021</a:t>
             </a:fld>
             <a:endParaRPr lang="en-US"/>
           </a:p>
@@ -7534,7 +7533,7 @@
           <a:p>
             <a:fld id="{B3A65DBF-A9F0-C148-993C-2303F706A4CD}" type="datetimeFigureOut">
               <a:rPr lang="en-US" smtClean="0"/>
-              <a:t>12/27/2021</a:t>
+              <a:t>12/28/2021</a:t>
             </a:fld>
             <a:endParaRPr lang="en-US"/>
           </a:p>
@@ -7714,7 +7713,7 @@
           <a:p>
             <a:fld id="{B3A65DBF-A9F0-C148-993C-2303F706A4CD}" type="datetimeFigureOut">
               <a:rPr lang="en-US" smtClean="0"/>
-              <a:t>12/27/2021</a:t>
+              <a:t>12/28/2021</a:t>
             </a:fld>
             <a:endParaRPr lang="en-US"/>
           </a:p>
@@ -7884,7 +7883,7 @@
           <a:p>
             <a:fld id="{B3A65DBF-A9F0-C148-993C-2303F706A4CD}" type="datetimeFigureOut">
               <a:rPr lang="en-US" smtClean="0"/>
-              <a:t>12/27/2021</a:t>
+              <a:t>12/28/2021</a:t>
             </a:fld>
             <a:endParaRPr lang="en-US"/>
           </a:p>
@@ -8134,7 +8133,7 @@
           <a:p>
             <a:fld id="{B3A65DBF-A9F0-C148-993C-2303F706A4CD}" type="datetimeFigureOut">
               <a:rPr lang="en-US" smtClean="0"/>
-              <a:t>12/27/2021</a:t>
+              <a:t>12/28/2021</a:t>
             </a:fld>
             <a:endParaRPr lang="en-US"/>
           </a:p>
@@ -8366,7 +8365,7 @@
           <a:p>
             <a:fld id="{B3A65DBF-A9F0-C148-993C-2303F706A4CD}" type="datetimeFigureOut">
               <a:rPr lang="en-US" smtClean="0"/>
-              <a:t>12/27/2021</a:t>
+              <a:t>12/28/2021</a:t>
             </a:fld>
             <a:endParaRPr lang="en-US"/>
           </a:p>
@@ -8747,7 +8746,7 @@
           <a:p>
             <a:fld id="{B3A65DBF-A9F0-C148-993C-2303F706A4CD}" type="datetimeFigureOut">
               <a:rPr lang="en-US" smtClean="0"/>
-              <a:t>12/27/2021</a:t>
+              <a:t>12/28/2021</a:t>
             </a:fld>
             <a:endParaRPr lang="en-US"/>
           </a:p>
@@ -8865,7 +8864,7 @@
           <a:p>
             <a:fld id="{B3A65DBF-A9F0-C148-993C-2303F706A4CD}" type="datetimeFigureOut">
               <a:rPr lang="en-US" smtClean="0"/>
-              <a:t>12/27/2021</a:t>
+              <a:t>12/28/2021</a:t>
             </a:fld>
             <a:endParaRPr lang="en-US"/>
           </a:p>
@@ -8960,7 +8959,7 @@
           <a:p>
             <a:fld id="{B3A65DBF-A9F0-C148-993C-2303F706A4CD}" type="datetimeFigureOut">
               <a:rPr lang="en-US" smtClean="0"/>
-              <a:t>12/27/2021</a:t>
+              <a:t>12/28/2021</a:t>
             </a:fld>
             <a:endParaRPr lang="en-US"/>
           </a:p>
@@ -9209,7 +9208,7 @@
           <a:p>
             <a:fld id="{B3A65DBF-A9F0-C148-993C-2303F706A4CD}" type="datetimeFigureOut">
               <a:rPr lang="en-US" smtClean="0"/>
-              <a:t>12/27/2021</a:t>
+              <a:t>12/28/2021</a:t>
             </a:fld>
             <a:endParaRPr lang="en-US"/>
           </a:p>
@@ -9489,7 +9488,7 @@
           <a:p>
             <a:fld id="{B3A65DBF-A9F0-C148-993C-2303F706A4CD}" type="datetimeFigureOut">
               <a:rPr lang="en-US" smtClean="0"/>
-              <a:t>12/27/2021</a:t>
+              <a:t>12/28/2021</a:t>
             </a:fld>
             <a:endParaRPr lang="en-US"/>
           </a:p>
@@ -9612,7 +9611,7 @@
           <a:noFill/>
           <a:extLst>
             <a:ext uri="{909E8E84-426E-40dd-AFC4-6F175D3DCCD1}">
-              <a14:hiddenFill xmlns="" xmlns:a14="http://schemas.microsoft.com/office/drawing/2010/main">
+              <a14:hiddenFill xmlns:a14="http://schemas.microsoft.com/office/drawing/2010/main" xmlns="">
                 <a:solidFill>
                   <a:srgbClr val="FFFFFF"/>
                 </a:solidFill>
@@ -9686,7 +9685,7 @@
               </a:ln>
               <a:extLst>
                 <a:ext uri="{91240B29-F687-4f45-9708-019B960494DF}">
-                  <a14:hiddenLine xmlns="" xmlns:a14="http://schemas.microsoft.com/office/drawing/2010/main" w="9525">
+                  <a14:hiddenLine xmlns:a14="http://schemas.microsoft.com/office/drawing/2010/main" xmlns="" w="9525">
                     <a:solidFill>
                       <a:srgbClr val="000000"/>
                     </a:solidFill>
@@ -9776,7 +9775,7 @@
               </a:ln>
               <a:extLst>
                 <a:ext uri="{91240B29-F687-4f45-9708-019B960494DF}">
-                  <a14:hiddenLine xmlns="" xmlns:a14="http://schemas.microsoft.com/office/drawing/2010/main" w="9525">
+                  <a14:hiddenLine xmlns:a14="http://schemas.microsoft.com/office/drawing/2010/main" xmlns="" w="9525">
                     <a:solidFill>
                       <a:srgbClr val="000000"/>
                     </a:solidFill>
@@ -9866,7 +9865,7 @@
               </a:ln>
               <a:extLst>
                 <a:ext uri="{91240B29-F687-4f45-9708-019B960494DF}">
-                  <a14:hiddenLine xmlns="" xmlns:a14="http://schemas.microsoft.com/office/drawing/2010/main" w="9525">
+                  <a14:hiddenLine xmlns:a14="http://schemas.microsoft.com/office/drawing/2010/main" xmlns="" w="9525">
                     <a:solidFill>
                       <a:srgbClr val="000000"/>
                     </a:solidFill>
@@ -9928,7 +9927,7 @@
               </a:ln>
               <a:extLst>
                 <a:ext uri="{91240B29-F687-4f45-9708-019B960494DF}">
-                  <a14:hiddenLine xmlns="" xmlns:a14="http://schemas.microsoft.com/office/drawing/2010/main" w="9525">
+                  <a14:hiddenLine xmlns:a14="http://schemas.microsoft.com/office/drawing/2010/main" xmlns="" w="9525">
                     <a:solidFill>
                       <a:srgbClr val="000000"/>
                     </a:solidFill>
@@ -10018,7 +10017,7 @@
               </a:ln>
               <a:extLst>
                 <a:ext uri="{91240B29-F687-4f45-9708-019B960494DF}">
-                  <a14:hiddenLine xmlns="" xmlns:a14="http://schemas.microsoft.com/office/drawing/2010/main" w="9525">
+                  <a14:hiddenLine xmlns:a14="http://schemas.microsoft.com/office/drawing/2010/main" xmlns="" w="9525">
                     <a:solidFill>
                       <a:srgbClr val="000000"/>
                     </a:solidFill>
@@ -10080,7 +10079,7 @@
               </a:ln>
               <a:extLst>
                 <a:ext uri="{91240B29-F687-4f45-9708-019B960494DF}">
-                  <a14:hiddenLine xmlns="" xmlns:a14="http://schemas.microsoft.com/office/drawing/2010/main" w="9525">
+                  <a14:hiddenLine xmlns:a14="http://schemas.microsoft.com/office/drawing/2010/main" xmlns="" w="9525">
                     <a:solidFill>
                       <a:srgbClr val="000000"/>
                     </a:solidFill>
@@ -10142,7 +10141,7 @@
               </a:ln>
               <a:extLst>
                 <a:ext uri="{91240B29-F687-4f45-9708-019B960494DF}">
-                  <a14:hiddenLine xmlns="" xmlns:a14="http://schemas.microsoft.com/office/drawing/2010/main" w="9525">
+                  <a14:hiddenLine xmlns:a14="http://schemas.microsoft.com/office/drawing/2010/main" xmlns="" w="9525">
                     <a:solidFill>
                       <a:srgbClr val="000000"/>
                     </a:solidFill>
@@ -10232,7 +10231,7 @@
               </a:ln>
               <a:extLst>
                 <a:ext uri="{91240B29-F687-4f45-9708-019B960494DF}">
-                  <a14:hiddenLine xmlns="" xmlns:a14="http://schemas.microsoft.com/office/drawing/2010/main" w="9525">
+                  <a14:hiddenLine xmlns:a14="http://schemas.microsoft.com/office/drawing/2010/main" xmlns="" w="9525">
                     <a:solidFill>
                       <a:srgbClr val="000000"/>
                     </a:solidFill>
@@ -10322,7 +10321,7 @@
               </a:ln>
               <a:extLst>
                 <a:ext uri="{91240B29-F687-4f45-9708-019B960494DF}">
-                  <a14:hiddenLine xmlns="" xmlns:a14="http://schemas.microsoft.com/office/drawing/2010/main" w="9525">
+                  <a14:hiddenLine xmlns:a14="http://schemas.microsoft.com/office/drawing/2010/main" xmlns="" w="9525">
                     <a:solidFill>
                       <a:srgbClr val="000000"/>
                     </a:solidFill>
@@ -10384,7 +10383,7 @@
               </a:ln>
               <a:extLst>
                 <a:ext uri="{91240B29-F687-4f45-9708-019B960494DF}">
-                  <a14:hiddenLine xmlns="" xmlns:a14="http://schemas.microsoft.com/office/drawing/2010/main" w="9525">
+                  <a14:hiddenLine xmlns:a14="http://schemas.microsoft.com/office/drawing/2010/main" xmlns="" w="9525">
                     <a:solidFill>
                       <a:srgbClr val="000000"/>
                     </a:solidFill>
@@ -10494,7 +10493,7 @@
               </a:ln>
               <a:extLst>
                 <a:ext uri="{91240B29-F687-4f45-9708-019B960494DF}">
-                  <a14:hiddenLine xmlns="" xmlns:a14="http://schemas.microsoft.com/office/drawing/2010/main" w="9525">
+                  <a14:hiddenLine xmlns:a14="http://schemas.microsoft.com/office/drawing/2010/main" xmlns="" w="9525">
                     <a:solidFill>
                       <a:srgbClr val="000000"/>
                     </a:solidFill>
@@ -10578,7 +10577,7 @@
               </a:ln>
               <a:extLst>
                 <a:ext uri="{91240B29-F687-4f45-9708-019B960494DF}">
-                  <a14:hiddenLine xmlns="" xmlns:a14="http://schemas.microsoft.com/office/drawing/2010/main" w="9525">
+                  <a14:hiddenLine xmlns:a14="http://schemas.microsoft.com/office/drawing/2010/main" xmlns="" w="9525">
                     <a:solidFill>
                       <a:srgbClr val="000000"/>
                     </a:solidFill>
@@ -10640,7 +10639,7 @@
               </a:ln>
               <a:extLst>
                 <a:ext uri="{91240B29-F687-4f45-9708-019B960494DF}">
-                  <a14:hiddenLine xmlns="" xmlns:a14="http://schemas.microsoft.com/office/drawing/2010/main" w="9525">
+                  <a14:hiddenLine xmlns:a14="http://schemas.microsoft.com/office/drawing/2010/main" xmlns="" w="9525">
                     <a:solidFill>
                       <a:srgbClr val="000000"/>
                     </a:solidFill>
@@ -10702,7 +10701,7 @@
               </a:ln>
               <a:extLst>
                 <a:ext uri="{91240B29-F687-4f45-9708-019B960494DF}">
-                  <a14:hiddenLine xmlns="" xmlns:a14="http://schemas.microsoft.com/office/drawing/2010/main" w="9525">
+                  <a14:hiddenLine xmlns:a14="http://schemas.microsoft.com/office/drawing/2010/main" xmlns="" w="9525">
                     <a:solidFill>
                       <a:srgbClr val="000000"/>
                     </a:solidFill>
@@ -10792,7 +10791,7 @@
               </a:ln>
               <a:extLst>
                 <a:ext uri="{91240B29-F687-4f45-9708-019B960494DF}">
-                  <a14:hiddenLine xmlns="" xmlns:a14="http://schemas.microsoft.com/office/drawing/2010/main" w="9525">
+                  <a14:hiddenLine xmlns:a14="http://schemas.microsoft.com/office/drawing/2010/main" xmlns="" w="9525">
                     <a:solidFill>
                       <a:srgbClr val="000000"/>
                     </a:solidFill>
@@ -10826,7 +10825,7 @@
               </a:ln>
               <a:extLst>
                 <a:ext uri="{91240B29-F687-4f45-9708-019B960494DF}">
-                  <a14:hiddenLine xmlns="" xmlns:a14="http://schemas.microsoft.com/office/drawing/2010/main" w="9525">
+                  <a14:hiddenLine xmlns:a14="http://schemas.microsoft.com/office/drawing/2010/main" xmlns="" w="9525">
                     <a:solidFill>
                       <a:srgbClr val="000000"/>
                     </a:solidFill>
@@ -10891,7 +10890,7 @@
               </a:ln>
               <a:extLst>
                 <a:ext uri="{91240B29-F687-4f45-9708-019B960494DF}">
-                  <a14:hiddenLine xmlns="" xmlns:a14="http://schemas.microsoft.com/office/drawing/2010/main" w="9525">
+                  <a14:hiddenLine xmlns:a14="http://schemas.microsoft.com/office/drawing/2010/main" xmlns="" w="9525">
                     <a:solidFill>
                       <a:srgbClr val="000000"/>
                     </a:solidFill>
@@ -10981,7 +10980,7 @@
               </a:ln>
               <a:extLst>
                 <a:ext uri="{91240B29-F687-4f45-9708-019B960494DF}">
-                  <a14:hiddenLine xmlns="" xmlns:a14="http://schemas.microsoft.com/office/drawing/2010/main" w="9525">
+                  <a14:hiddenLine xmlns:a14="http://schemas.microsoft.com/office/drawing/2010/main" xmlns="" w="9525">
                     <a:solidFill>
                       <a:srgbClr val="000000"/>
                     </a:solidFill>
@@ -11043,7 +11042,7 @@
               </a:ln>
               <a:extLst>
                 <a:ext uri="{91240B29-F687-4f45-9708-019B960494DF}">
-                  <a14:hiddenLine xmlns="" xmlns:a14="http://schemas.microsoft.com/office/drawing/2010/main" w="9525">
+                  <a14:hiddenLine xmlns:a14="http://schemas.microsoft.com/office/drawing/2010/main" xmlns="" w="9525">
                     <a:solidFill>
                       <a:srgbClr val="000000"/>
                     </a:solidFill>
@@ -11133,7 +11132,7 @@
               </a:ln>
               <a:extLst>
                 <a:ext uri="{91240B29-F687-4f45-9708-019B960494DF}">
-                  <a14:hiddenLine xmlns="" xmlns:a14="http://schemas.microsoft.com/office/drawing/2010/main" w="9525">
+                  <a14:hiddenLine xmlns:a14="http://schemas.microsoft.com/office/drawing/2010/main" xmlns="" w="9525">
                     <a:solidFill>
                       <a:srgbClr val="000000"/>
                     </a:solidFill>
@@ -11198,7 +11197,7 @@
               </a:ln>
               <a:extLst>
                 <a:ext uri="{91240B29-F687-4f45-9708-019B960494DF}">
-                  <a14:hiddenLine xmlns="" xmlns:a14="http://schemas.microsoft.com/office/drawing/2010/main" w="9525">
+                  <a14:hiddenLine xmlns:a14="http://schemas.microsoft.com/office/drawing/2010/main" xmlns="" w="9525">
                     <a:solidFill>
                       <a:srgbClr val="000000"/>
                     </a:solidFill>
@@ -11260,7 +11259,7 @@
               </a:ln>
               <a:extLst>
                 <a:ext uri="{91240B29-F687-4f45-9708-019B960494DF}">
-                  <a14:hiddenLine xmlns="" xmlns:a14="http://schemas.microsoft.com/office/drawing/2010/main" w="9525">
+                  <a14:hiddenLine xmlns:a14="http://schemas.microsoft.com/office/drawing/2010/main" xmlns="" w="9525">
                     <a:solidFill>
                       <a:srgbClr val="000000"/>
                     </a:solidFill>
@@ -11350,7 +11349,7 @@
               </a:ln>
               <a:extLst>
                 <a:ext uri="{91240B29-F687-4f45-9708-019B960494DF}">
-                  <a14:hiddenLine xmlns="" xmlns:a14="http://schemas.microsoft.com/office/drawing/2010/main" w="9525">
+                  <a14:hiddenLine xmlns:a14="http://schemas.microsoft.com/office/drawing/2010/main" xmlns="" w="9525">
                     <a:solidFill>
                       <a:srgbClr val="000000"/>
                     </a:solidFill>
@@ -11440,7 +11439,7 @@
               </a:ln>
               <a:extLst>
                 <a:ext uri="{91240B29-F687-4f45-9708-019B960494DF}">
-                  <a14:hiddenLine xmlns="" xmlns:a14="http://schemas.microsoft.com/office/drawing/2010/main" w="9525">
+                  <a14:hiddenLine xmlns:a14="http://schemas.microsoft.com/office/drawing/2010/main" xmlns="" w="9525">
                     <a:solidFill>
                       <a:srgbClr val="000000"/>
                     </a:solidFill>
@@ -11505,7 +11504,7 @@
               </a:ln>
               <a:extLst>
                 <a:ext uri="{91240B29-F687-4f45-9708-019B960494DF}">
-                  <a14:hiddenLine xmlns="" xmlns:a14="http://schemas.microsoft.com/office/drawing/2010/main" w="9525">
+                  <a14:hiddenLine xmlns:a14="http://schemas.microsoft.com/office/drawing/2010/main" xmlns="" w="9525">
                     <a:solidFill>
                       <a:srgbClr val="000000"/>
                     </a:solidFill>
@@ -11625,7 +11624,7 @@
               </a:ln>
               <a:extLst>
                 <a:ext uri="{91240B29-F687-4f45-9708-019B960494DF}">
-                  <a14:hiddenLine xmlns="" xmlns:a14="http://schemas.microsoft.com/office/drawing/2010/main" w="9525">
+                  <a14:hiddenLine xmlns:a14="http://schemas.microsoft.com/office/drawing/2010/main" xmlns="" w="9525">
                     <a:solidFill>
                       <a:srgbClr val="000000"/>
                     </a:solidFill>
@@ -11706,7 +11705,7 @@
               </a:ln>
               <a:extLst>
                 <a:ext uri="{91240B29-F687-4f45-9708-019B960494DF}">
-                  <a14:hiddenLine xmlns="" xmlns:a14="http://schemas.microsoft.com/office/drawing/2010/main" w="9525">
+                  <a14:hiddenLine xmlns:a14="http://schemas.microsoft.com/office/drawing/2010/main" xmlns="" w="9525">
                     <a:solidFill>
                       <a:srgbClr val="000000"/>
                     </a:solidFill>
@@ -11821,7 +11820,7 @@
               </a:ln>
               <a:extLst>
                 <a:ext uri="{91240B29-F687-4f45-9708-019B960494DF}">
-                  <a14:hiddenLine xmlns="" xmlns:a14="http://schemas.microsoft.com/office/drawing/2010/main" w="9525">
+                  <a14:hiddenLine xmlns:a14="http://schemas.microsoft.com/office/drawing/2010/main" xmlns="" w="9525">
                     <a:solidFill>
                       <a:srgbClr val="000000"/>
                     </a:solidFill>
@@ -11911,7 +11910,7 @@
               </a:ln>
               <a:extLst>
                 <a:ext uri="{91240B29-F687-4f45-9708-019B960494DF}">
-                  <a14:hiddenLine xmlns="" xmlns:a14="http://schemas.microsoft.com/office/drawing/2010/main" w="9525">
+                  <a14:hiddenLine xmlns:a14="http://schemas.microsoft.com/office/drawing/2010/main" xmlns="" w="9525">
                     <a:solidFill>
                       <a:srgbClr val="000000"/>
                     </a:solidFill>
@@ -11976,7 +11975,7 @@
               </a:ln>
               <a:extLst>
                 <a:ext uri="{91240B29-F687-4f45-9708-019B960494DF}">
-                  <a14:hiddenLine xmlns="" xmlns:a14="http://schemas.microsoft.com/office/drawing/2010/main" w="9525">
+                  <a14:hiddenLine xmlns:a14="http://schemas.microsoft.com/office/drawing/2010/main" xmlns="" w="9525">
                     <a:solidFill>
                       <a:srgbClr val="000000"/>
                     </a:solidFill>
@@ -12066,7 +12065,7 @@
               </a:ln>
               <a:extLst>
                 <a:ext uri="{91240B29-F687-4f45-9708-019B960494DF}">
-                  <a14:hiddenLine xmlns="" xmlns:a14="http://schemas.microsoft.com/office/drawing/2010/main" w="9525">
+                  <a14:hiddenLine xmlns:a14="http://schemas.microsoft.com/office/drawing/2010/main" xmlns="" w="9525">
                     <a:solidFill>
                       <a:srgbClr val="000000"/>
                     </a:solidFill>
@@ -12134,7 +12133,7 @@
               </a:ln>
               <a:extLst>
                 <a:ext uri="{91240B29-F687-4f45-9708-019B960494DF}">
-                  <a14:hiddenLine xmlns="" xmlns:a14="http://schemas.microsoft.com/office/drawing/2010/main" w="9525">
+                  <a14:hiddenLine xmlns:a14="http://schemas.microsoft.com/office/drawing/2010/main" xmlns="" w="9525">
                     <a:solidFill>
                       <a:srgbClr val="000000"/>
                     </a:solidFill>
@@ -12224,7 +12223,7 @@
               </a:ln>
               <a:extLst>
                 <a:ext uri="{91240B29-F687-4f45-9708-019B960494DF}">
-                  <a14:hiddenLine xmlns="" xmlns:a14="http://schemas.microsoft.com/office/drawing/2010/main" w="9525">
+                  <a14:hiddenLine xmlns:a14="http://schemas.microsoft.com/office/drawing/2010/main" xmlns="" w="9525">
                     <a:solidFill>
                       <a:srgbClr val="000000"/>
                     </a:solidFill>
@@ -12292,7 +12291,7 @@
               </a:ln>
               <a:extLst>
                 <a:ext uri="{91240B29-F687-4f45-9708-019B960494DF}">
-                  <a14:hiddenLine xmlns="" xmlns:a14="http://schemas.microsoft.com/office/drawing/2010/main" w="9525">
+                  <a14:hiddenLine xmlns:a14="http://schemas.microsoft.com/office/drawing/2010/main" xmlns="" w="9525">
                     <a:solidFill>
                       <a:srgbClr val="000000"/>
                     </a:solidFill>
@@ -12382,7 +12381,7 @@
               </a:ln>
               <a:extLst>
                 <a:ext uri="{91240B29-F687-4f45-9708-019B960494DF}">
-                  <a14:hiddenLine xmlns="" xmlns:a14="http://schemas.microsoft.com/office/drawing/2010/main" w="9525">
+                  <a14:hiddenLine xmlns:a14="http://schemas.microsoft.com/office/drawing/2010/main" xmlns="" w="9525">
                     <a:solidFill>
                       <a:srgbClr val="000000"/>
                     </a:solidFill>
@@ -12416,7 +12415,7 @@
               </a:ln>
               <a:extLst>
                 <a:ext uri="{91240B29-F687-4f45-9708-019B960494DF}">
-                  <a14:hiddenLine xmlns="" xmlns:a14="http://schemas.microsoft.com/office/drawing/2010/main" w="9525">
+                  <a14:hiddenLine xmlns:a14="http://schemas.microsoft.com/office/drawing/2010/main" xmlns="" w="9525">
                     <a:solidFill>
                       <a:srgbClr val="000000"/>
                     </a:solidFill>
@@ -12556,7 +12555,7 @@
           <a:p>
             <a:fld id="{B3A65DBF-A9F0-C148-993C-2303F706A4CD}" type="datetimeFigureOut">
               <a:rPr lang="en-US" smtClean="0"/>
-              <a:t>12/27/2021</a:t>
+              <a:t>12/28/2021</a:t>
             </a:fld>
             <a:endParaRPr lang="en-US"/>
           </a:p>
@@ -13144,7 +13143,7 @@
             <a:noFill/>
             <a:extLst>
               <a:ext uri="{909E8E84-426E-40dd-AFC4-6F175D3DCCD1}">
-                <a14:hiddenFill xmlns:p14="http://schemas.microsoft.com/office/powerpoint/2010/main" xmlns:a14="http://schemas.microsoft.com/office/drawing/2010/main" xmlns:a16="http://schemas.microsoft.com/office/drawing/2014/main" xmlns="">
+                <a14:hiddenFill xmlns="" xmlns:a16="http://schemas.microsoft.com/office/drawing/2014/main" xmlns:a14="http://schemas.microsoft.com/office/drawing/2010/main" xmlns:p14="http://schemas.microsoft.com/office/powerpoint/2010/main">
                   <a:solidFill>
                     <a:srgbClr val="FFFFFF"/>
                   </a:solidFill>
@@ -13299,7 +13298,7 @@
             </a:ln>
             <a:extLst>
               <a:ext uri="{91240B29-F687-4f45-9708-019B960494DF}">
-                <a14:hiddenLine xmlns:p14="http://schemas.microsoft.com/office/powerpoint/2010/main" xmlns:a14="http://schemas.microsoft.com/office/drawing/2010/main" xmlns:a16="http://schemas.microsoft.com/office/drawing/2014/main" xmlns="" w="9525">
+                <a14:hiddenLine xmlns="" xmlns:a16="http://schemas.microsoft.com/office/drawing/2014/main" xmlns:a14="http://schemas.microsoft.com/office/drawing/2010/main" xmlns:p14="http://schemas.microsoft.com/office/powerpoint/2010/main" w="9525">
                   <a:solidFill>
                     <a:srgbClr val="000000"/>
                   </a:solidFill>
@@ -13404,7 +13403,7 @@
             </a:ln>
             <a:extLst>
               <a:ext uri="{91240B29-F687-4f45-9708-019B960494DF}">
-                <a14:hiddenLine xmlns:p14="http://schemas.microsoft.com/office/powerpoint/2010/main" xmlns:a14="http://schemas.microsoft.com/office/drawing/2010/main" xmlns:a16="http://schemas.microsoft.com/office/drawing/2014/main" xmlns="" w="9525">
+                <a14:hiddenLine xmlns="" xmlns:a16="http://schemas.microsoft.com/office/drawing/2014/main" xmlns:a14="http://schemas.microsoft.com/office/drawing/2010/main" xmlns:p14="http://schemas.microsoft.com/office/powerpoint/2010/main" w="9525">
                   <a:solidFill>
                     <a:srgbClr val="000000"/>
                   </a:solidFill>
@@ -13509,7 +13508,7 @@
             </a:ln>
             <a:extLst>
               <a:ext uri="{91240B29-F687-4f45-9708-019B960494DF}">
-                <a14:hiddenLine xmlns:p14="http://schemas.microsoft.com/office/powerpoint/2010/main" xmlns:a14="http://schemas.microsoft.com/office/drawing/2010/main" xmlns:a16="http://schemas.microsoft.com/office/drawing/2014/main" xmlns="" w="9525">
+                <a14:hiddenLine xmlns="" xmlns:a16="http://schemas.microsoft.com/office/drawing/2014/main" xmlns:a14="http://schemas.microsoft.com/office/drawing/2010/main" xmlns:p14="http://schemas.microsoft.com/office/powerpoint/2010/main" w="9525">
                   <a:solidFill>
                     <a:srgbClr val="000000"/>
                   </a:solidFill>
@@ -13558,7 +13557,7 @@
             </a:ln>
             <a:extLst>
               <a:ext uri="{91240B29-F687-4f45-9708-019B960494DF}">
-                <a14:hiddenLine xmlns:p14="http://schemas.microsoft.com/office/powerpoint/2010/main" xmlns:a14="http://schemas.microsoft.com/office/drawing/2010/main" xmlns:a16="http://schemas.microsoft.com/office/drawing/2014/main" xmlns="" w="9525">
+                <a14:hiddenLine xmlns="" xmlns:a16="http://schemas.microsoft.com/office/drawing/2014/main" xmlns:a14="http://schemas.microsoft.com/office/drawing/2010/main" xmlns:p14="http://schemas.microsoft.com/office/powerpoint/2010/main" w="9525">
                   <a:solidFill>
                     <a:srgbClr val="000000"/>
                   </a:solidFill>
@@ -13663,7 +13662,7 @@
             </a:ln>
             <a:extLst>
               <a:ext uri="{91240B29-F687-4f45-9708-019B960494DF}">
-                <a14:hiddenLine xmlns:p14="http://schemas.microsoft.com/office/powerpoint/2010/main" xmlns:a14="http://schemas.microsoft.com/office/drawing/2010/main" xmlns:a16="http://schemas.microsoft.com/office/drawing/2014/main" xmlns="" w="9525">
+                <a14:hiddenLine xmlns="" xmlns:a16="http://schemas.microsoft.com/office/drawing/2014/main" xmlns:a14="http://schemas.microsoft.com/office/drawing/2010/main" xmlns:p14="http://schemas.microsoft.com/office/powerpoint/2010/main" w="9525">
                   <a:solidFill>
                     <a:srgbClr val="000000"/>
                   </a:solidFill>
@@ -13740,7 +13739,7 @@
             </a:ln>
             <a:extLst>
               <a:ext uri="{91240B29-F687-4f45-9708-019B960494DF}">
-                <a14:hiddenLine xmlns:p14="http://schemas.microsoft.com/office/powerpoint/2010/main" xmlns:a14="http://schemas.microsoft.com/office/drawing/2010/main" xmlns:a16="http://schemas.microsoft.com/office/drawing/2014/main" xmlns="" w="9525">
+                <a14:hiddenLine xmlns="" xmlns:a16="http://schemas.microsoft.com/office/drawing/2014/main" xmlns:a14="http://schemas.microsoft.com/office/drawing/2010/main" xmlns:p14="http://schemas.microsoft.com/office/powerpoint/2010/main" w="9525">
                   <a:solidFill>
                     <a:srgbClr val="000000"/>
                   </a:solidFill>
@@ -13817,7 +13816,7 @@
             </a:ln>
             <a:extLst>
               <a:ext uri="{91240B29-F687-4f45-9708-019B960494DF}">
-                <a14:hiddenLine xmlns:p14="http://schemas.microsoft.com/office/powerpoint/2010/main" xmlns:a14="http://schemas.microsoft.com/office/drawing/2010/main" xmlns:a16="http://schemas.microsoft.com/office/drawing/2014/main" xmlns="" w="9525">
+                <a14:hiddenLine xmlns="" xmlns:a16="http://schemas.microsoft.com/office/drawing/2014/main" xmlns:a14="http://schemas.microsoft.com/office/drawing/2010/main" xmlns:p14="http://schemas.microsoft.com/office/powerpoint/2010/main" w="9525">
                   <a:solidFill>
                     <a:srgbClr val="000000"/>
                   </a:solidFill>
@@ -13922,7 +13921,7 @@
             </a:ln>
             <a:extLst>
               <a:ext uri="{91240B29-F687-4f45-9708-019B960494DF}">
-                <a14:hiddenLine xmlns:p14="http://schemas.microsoft.com/office/powerpoint/2010/main" xmlns:a14="http://schemas.microsoft.com/office/drawing/2010/main" xmlns:a16="http://schemas.microsoft.com/office/drawing/2014/main" xmlns="" w="9525">
+                <a14:hiddenLine xmlns="" xmlns:a16="http://schemas.microsoft.com/office/drawing/2014/main" xmlns:a14="http://schemas.microsoft.com/office/drawing/2010/main" xmlns:p14="http://schemas.microsoft.com/office/powerpoint/2010/main" w="9525">
                   <a:solidFill>
                     <a:srgbClr val="000000"/>
                   </a:solidFill>
@@ -13999,7 +13998,7 @@
             </a:ln>
             <a:extLst>
               <a:ext uri="{91240B29-F687-4f45-9708-019B960494DF}">
-                <a14:hiddenLine xmlns:p14="http://schemas.microsoft.com/office/powerpoint/2010/main" xmlns:a14="http://schemas.microsoft.com/office/drawing/2010/main" xmlns:a16="http://schemas.microsoft.com/office/drawing/2014/main" xmlns="" w="9525">
+                <a14:hiddenLine xmlns="" xmlns:a16="http://schemas.microsoft.com/office/drawing/2014/main" xmlns:a14="http://schemas.microsoft.com/office/drawing/2010/main" xmlns:p14="http://schemas.microsoft.com/office/powerpoint/2010/main" w="9525">
                   <a:solidFill>
                     <a:srgbClr val="000000"/>
                   </a:solidFill>
@@ -14076,7 +14075,7 @@
             </a:ln>
             <a:extLst>
               <a:ext uri="{91240B29-F687-4f45-9708-019B960494DF}">
-                <a14:hiddenLine xmlns:p14="http://schemas.microsoft.com/office/powerpoint/2010/main" xmlns:a14="http://schemas.microsoft.com/office/drawing/2010/main" xmlns:a16="http://schemas.microsoft.com/office/drawing/2014/main" xmlns="" w="9525">
+                <a14:hiddenLine xmlns="" xmlns:a16="http://schemas.microsoft.com/office/drawing/2014/main" xmlns:a14="http://schemas.microsoft.com/office/drawing/2010/main" xmlns:p14="http://schemas.microsoft.com/office/powerpoint/2010/main" w="9525">
                   <a:solidFill>
                     <a:srgbClr val="000000"/>
                   </a:solidFill>
@@ -14181,7 +14180,7 @@
             </a:ln>
             <a:extLst>
               <a:ext uri="{91240B29-F687-4f45-9708-019B960494DF}">
-                <a14:hiddenLine xmlns:p14="http://schemas.microsoft.com/office/powerpoint/2010/main" xmlns:a14="http://schemas.microsoft.com/office/drawing/2010/main" xmlns:a16="http://schemas.microsoft.com/office/drawing/2014/main" xmlns="" w="9525">
+                <a14:hiddenLine xmlns="" xmlns:a16="http://schemas.microsoft.com/office/drawing/2014/main" xmlns:a14="http://schemas.microsoft.com/office/drawing/2010/main" xmlns:p14="http://schemas.microsoft.com/office/powerpoint/2010/main" w="9525">
                   <a:solidFill>
                     <a:srgbClr val="000000"/>
                   </a:solidFill>
@@ -14286,7 +14285,7 @@
             </a:ln>
             <a:extLst>
               <a:ext uri="{91240B29-F687-4f45-9708-019B960494DF}">
-                <a14:hiddenLine xmlns:p14="http://schemas.microsoft.com/office/powerpoint/2010/main" xmlns:a14="http://schemas.microsoft.com/office/drawing/2010/main" xmlns:a16="http://schemas.microsoft.com/office/drawing/2014/main" xmlns="" w="9525">
+                <a14:hiddenLine xmlns="" xmlns:a16="http://schemas.microsoft.com/office/drawing/2014/main" xmlns:a14="http://schemas.microsoft.com/office/drawing/2010/main" xmlns:p14="http://schemas.microsoft.com/office/powerpoint/2010/main" w="9525">
                   <a:solidFill>
                     <a:srgbClr val="000000"/>
                   </a:solidFill>
@@ -14363,7 +14362,7 @@
             </a:ln>
             <a:extLst>
               <a:ext uri="{91240B29-F687-4f45-9708-019B960494DF}">
-                <a14:hiddenLine xmlns:p14="http://schemas.microsoft.com/office/powerpoint/2010/main" xmlns:a14="http://schemas.microsoft.com/office/drawing/2010/main" xmlns:a16="http://schemas.microsoft.com/office/drawing/2014/main" xmlns="" w="9525">
+                <a14:hiddenLine xmlns="" xmlns:a16="http://schemas.microsoft.com/office/drawing/2014/main" xmlns:a14="http://schemas.microsoft.com/office/drawing/2010/main" xmlns:p14="http://schemas.microsoft.com/office/powerpoint/2010/main" w="9525">
                   <a:solidFill>
                     <a:srgbClr val="000000"/>
                   </a:solidFill>
@@ -14488,7 +14487,7 @@
             </a:ln>
             <a:extLst>
               <a:ext uri="{91240B29-F687-4f45-9708-019B960494DF}">
-                <a14:hiddenLine xmlns:p14="http://schemas.microsoft.com/office/powerpoint/2010/main" xmlns:a14="http://schemas.microsoft.com/office/drawing/2010/main" xmlns:a16="http://schemas.microsoft.com/office/drawing/2014/main" xmlns="" w="9525">
+                <a14:hiddenLine xmlns="" xmlns:a16="http://schemas.microsoft.com/office/drawing/2014/main" xmlns:a14="http://schemas.microsoft.com/office/drawing/2010/main" xmlns:p14="http://schemas.microsoft.com/office/powerpoint/2010/main" w="9525">
                   <a:solidFill>
                     <a:srgbClr val="000000"/>
                   </a:solidFill>
@@ -14565,7 +14564,7 @@
             </a:ln>
             <a:extLst>
               <a:ext uri="{91240B29-F687-4f45-9708-019B960494DF}">
-                <a14:hiddenLine xmlns:p14="http://schemas.microsoft.com/office/powerpoint/2010/main" xmlns:a14="http://schemas.microsoft.com/office/drawing/2010/main" xmlns:a16="http://schemas.microsoft.com/office/drawing/2014/main" xmlns="" w="9525">
+                <a14:hiddenLine xmlns="" xmlns:a16="http://schemas.microsoft.com/office/drawing/2014/main" xmlns:a14="http://schemas.microsoft.com/office/drawing/2010/main" xmlns:p14="http://schemas.microsoft.com/office/powerpoint/2010/main" w="9525">
                   <a:solidFill>
                     <a:srgbClr val="000000"/>
                   </a:solidFill>
@@ -14670,7 +14669,7 @@
             </a:ln>
             <a:extLst>
               <a:ext uri="{91240B29-F687-4f45-9708-019B960494DF}">
-                <a14:hiddenLine xmlns:p14="http://schemas.microsoft.com/office/powerpoint/2010/main" xmlns:a14="http://schemas.microsoft.com/office/drawing/2010/main" xmlns:a16="http://schemas.microsoft.com/office/drawing/2014/main" xmlns="" w="9525">
+                <a14:hiddenLine xmlns="" xmlns:a16="http://schemas.microsoft.com/office/drawing/2014/main" xmlns:a14="http://schemas.microsoft.com/office/drawing/2010/main" xmlns:p14="http://schemas.microsoft.com/office/powerpoint/2010/main" w="9525">
                   <a:solidFill>
                     <a:srgbClr val="000000"/>
                   </a:solidFill>
@@ -14775,7 +14774,7 @@
             </a:ln>
             <a:extLst>
               <a:ext uri="{91240B29-F687-4f45-9708-019B960494DF}">
-                <a14:hiddenLine xmlns:p14="http://schemas.microsoft.com/office/powerpoint/2010/main" xmlns:a14="http://schemas.microsoft.com/office/drawing/2010/main" xmlns:a16="http://schemas.microsoft.com/office/drawing/2014/main" xmlns="" w="9525">
+                <a14:hiddenLine xmlns="" xmlns:a16="http://schemas.microsoft.com/office/drawing/2014/main" xmlns:a14="http://schemas.microsoft.com/office/drawing/2010/main" xmlns:p14="http://schemas.microsoft.com/office/powerpoint/2010/main" w="9525">
                   <a:solidFill>
                     <a:srgbClr val="000000"/>
                   </a:solidFill>
@@ -14852,7 +14851,7 @@
             </a:ln>
             <a:extLst>
               <a:ext uri="{91240B29-F687-4f45-9708-019B960494DF}">
-                <a14:hiddenLine xmlns:p14="http://schemas.microsoft.com/office/powerpoint/2010/main" xmlns:a14="http://schemas.microsoft.com/office/drawing/2010/main" xmlns:a16="http://schemas.microsoft.com/office/drawing/2014/main" xmlns="" w="9525">
+                <a14:hiddenLine xmlns="" xmlns:a16="http://schemas.microsoft.com/office/drawing/2014/main" xmlns:a14="http://schemas.microsoft.com/office/drawing/2010/main" xmlns:p14="http://schemas.microsoft.com/office/powerpoint/2010/main" w="9525">
                   <a:solidFill>
                     <a:srgbClr val="000000"/>
                   </a:solidFill>
@@ -14957,7 +14956,7 @@
             </a:ln>
             <a:extLst>
               <a:ext uri="{91240B29-F687-4f45-9708-019B960494DF}">
-                <a14:hiddenLine xmlns:p14="http://schemas.microsoft.com/office/powerpoint/2010/main" xmlns:a14="http://schemas.microsoft.com/office/drawing/2010/main" xmlns:a16="http://schemas.microsoft.com/office/drawing/2014/main" xmlns="" w="9525">
+                <a14:hiddenLine xmlns="" xmlns:a16="http://schemas.microsoft.com/office/drawing/2014/main" xmlns:a14="http://schemas.microsoft.com/office/drawing/2010/main" xmlns:p14="http://schemas.microsoft.com/office/powerpoint/2010/main" w="9525">
                   <a:solidFill>
                     <a:srgbClr val="000000"/>
                   </a:solidFill>
@@ -15062,7 +15061,7 @@
             </a:ln>
             <a:extLst>
               <a:ext uri="{91240B29-F687-4f45-9708-019B960494DF}">
-                <a14:hiddenLine xmlns:p14="http://schemas.microsoft.com/office/powerpoint/2010/main" xmlns:a14="http://schemas.microsoft.com/office/drawing/2010/main" xmlns:a16="http://schemas.microsoft.com/office/drawing/2014/main" xmlns="" w="9525">
+                <a14:hiddenLine xmlns="" xmlns:a16="http://schemas.microsoft.com/office/drawing/2014/main" xmlns:a14="http://schemas.microsoft.com/office/drawing/2010/main" xmlns:p14="http://schemas.microsoft.com/office/powerpoint/2010/main" w="9525">
                   <a:solidFill>
                     <a:srgbClr val="000000"/>
                   </a:solidFill>
@@ -15133,7 +15132,7 @@
             </a:ln>
             <a:extLst>
               <a:ext uri="{91240B29-F687-4f45-9708-019B960494DF}">
-                <a14:hiddenLine xmlns:p14="http://schemas.microsoft.com/office/powerpoint/2010/main" xmlns:a14="http://schemas.microsoft.com/office/drawing/2010/main" xmlns:a16="http://schemas.microsoft.com/office/drawing/2014/main" xmlns="" w="9525">
+                <a14:hiddenLine xmlns="" xmlns:a16="http://schemas.microsoft.com/office/drawing/2014/main" xmlns:a14="http://schemas.microsoft.com/office/drawing/2010/main" xmlns:p14="http://schemas.microsoft.com/office/powerpoint/2010/main" w="9525">
                   <a:solidFill>
                     <a:srgbClr val="000000"/>
                   </a:solidFill>
@@ -15238,7 +15237,7 @@
             </a:ln>
             <a:extLst>
               <a:ext uri="{91240B29-F687-4f45-9708-019B960494DF}">
-                <a14:hiddenLine xmlns:p14="http://schemas.microsoft.com/office/powerpoint/2010/main" xmlns:a14="http://schemas.microsoft.com/office/drawing/2010/main" xmlns:a16="http://schemas.microsoft.com/office/drawing/2014/main" xmlns="" w="9525">
+                <a14:hiddenLine xmlns="" xmlns:a16="http://schemas.microsoft.com/office/drawing/2014/main" xmlns:a14="http://schemas.microsoft.com/office/drawing/2010/main" xmlns:p14="http://schemas.microsoft.com/office/powerpoint/2010/main" w="9525">
                   <a:solidFill>
                     <a:srgbClr val="000000"/>
                   </a:solidFill>
@@ -15309,7 +15308,7 @@
             </a:ln>
             <a:extLst>
               <a:ext uri="{91240B29-F687-4f45-9708-019B960494DF}">
-                <a14:hiddenLine xmlns:p14="http://schemas.microsoft.com/office/powerpoint/2010/main" xmlns:a14="http://schemas.microsoft.com/office/drawing/2010/main" xmlns:a16="http://schemas.microsoft.com/office/drawing/2014/main" xmlns="" w="9525">
+                <a14:hiddenLine xmlns="" xmlns:a16="http://schemas.microsoft.com/office/drawing/2014/main" xmlns:a14="http://schemas.microsoft.com/office/drawing/2010/main" xmlns:p14="http://schemas.microsoft.com/office/powerpoint/2010/main" w="9525">
                   <a:solidFill>
                     <a:srgbClr val="000000"/>
                   </a:solidFill>
@@ -15414,7 +15413,7 @@
             </a:ln>
             <a:extLst>
               <a:ext uri="{91240B29-F687-4f45-9708-019B960494DF}">
-                <a14:hiddenLine xmlns:p14="http://schemas.microsoft.com/office/powerpoint/2010/main" xmlns:a14="http://schemas.microsoft.com/office/drawing/2010/main" xmlns:a16="http://schemas.microsoft.com/office/drawing/2014/main" xmlns="" w="9525">
+                <a14:hiddenLine xmlns="" xmlns:a16="http://schemas.microsoft.com/office/drawing/2014/main" xmlns:a14="http://schemas.microsoft.com/office/drawing/2010/main" xmlns:p14="http://schemas.microsoft.com/office/powerpoint/2010/main" w="9525">
                   <a:solidFill>
                     <a:srgbClr val="000000"/>
                   </a:solidFill>
@@ -15497,7 +15496,7 @@
             </a:ln>
             <a:extLst>
               <a:ext uri="{91240B29-F687-4f45-9708-019B960494DF}">
-                <a14:hiddenLine xmlns:p14="http://schemas.microsoft.com/office/powerpoint/2010/main" xmlns:a14="http://schemas.microsoft.com/office/drawing/2010/main" xmlns:a16="http://schemas.microsoft.com/office/drawing/2014/main" xmlns="" w="9525">
+                <a14:hiddenLine xmlns="" xmlns:a16="http://schemas.microsoft.com/office/drawing/2014/main" xmlns:a14="http://schemas.microsoft.com/office/drawing/2010/main" xmlns:p14="http://schemas.microsoft.com/office/powerpoint/2010/main" w="9525">
                   <a:solidFill>
                     <a:srgbClr val="000000"/>
                   </a:solidFill>
@@ -15602,7 +15601,7 @@
             </a:ln>
             <a:extLst>
               <a:ext uri="{91240B29-F687-4f45-9708-019B960494DF}">
-                <a14:hiddenLine xmlns:p14="http://schemas.microsoft.com/office/powerpoint/2010/main" xmlns:a14="http://schemas.microsoft.com/office/drawing/2010/main" xmlns:a16="http://schemas.microsoft.com/office/drawing/2014/main" xmlns="" w="9525">
+                <a14:hiddenLine xmlns="" xmlns:a16="http://schemas.microsoft.com/office/drawing/2014/main" xmlns:a14="http://schemas.microsoft.com/office/drawing/2010/main" xmlns:p14="http://schemas.microsoft.com/office/powerpoint/2010/main" w="9525">
                   <a:solidFill>
                     <a:srgbClr val="000000"/>
                   </a:solidFill>
@@ -15685,7 +15684,7 @@
             </a:ln>
             <a:extLst>
               <a:ext uri="{91240B29-F687-4f45-9708-019B960494DF}">
-                <a14:hiddenLine xmlns:p14="http://schemas.microsoft.com/office/powerpoint/2010/main" xmlns:a14="http://schemas.microsoft.com/office/drawing/2010/main" xmlns:a16="http://schemas.microsoft.com/office/drawing/2014/main" xmlns="" w="9525">
+                <a14:hiddenLine xmlns="" xmlns:a16="http://schemas.microsoft.com/office/drawing/2014/main" xmlns:a14="http://schemas.microsoft.com/office/drawing/2010/main" xmlns:p14="http://schemas.microsoft.com/office/powerpoint/2010/main" w="9525">
                   <a:solidFill>
                     <a:srgbClr val="000000"/>
                   </a:solidFill>
@@ -15790,7 +15789,7 @@
             </a:ln>
             <a:extLst>
               <a:ext uri="{91240B29-F687-4f45-9708-019B960494DF}">
-                <a14:hiddenLine xmlns:p14="http://schemas.microsoft.com/office/powerpoint/2010/main" xmlns:a14="http://schemas.microsoft.com/office/drawing/2010/main" xmlns:a16="http://schemas.microsoft.com/office/drawing/2014/main" xmlns="" w="9525">
+                <a14:hiddenLine xmlns="" xmlns:a16="http://schemas.microsoft.com/office/drawing/2014/main" xmlns:a14="http://schemas.microsoft.com/office/drawing/2010/main" xmlns:p14="http://schemas.microsoft.com/office/powerpoint/2010/main" w="9525">
                   <a:solidFill>
                     <a:srgbClr val="000000"/>
                   </a:solidFill>
@@ -15839,7 +15838,7 @@
             </a:ln>
             <a:extLst>
               <a:ext uri="{91240B29-F687-4f45-9708-019B960494DF}">
-                <a14:hiddenLine xmlns:p14="http://schemas.microsoft.com/office/powerpoint/2010/main" xmlns:a14="http://schemas.microsoft.com/office/drawing/2010/main" xmlns:a16="http://schemas.microsoft.com/office/drawing/2014/main" xmlns="" w="9525">
+                <a14:hiddenLine xmlns="" xmlns:a16="http://schemas.microsoft.com/office/drawing/2014/main" xmlns:a14="http://schemas.microsoft.com/office/drawing/2010/main" xmlns:p14="http://schemas.microsoft.com/office/powerpoint/2010/main" w="9525">
                   <a:solidFill>
                     <a:srgbClr val="000000"/>
                   </a:solidFill>
@@ -15944,7 +15943,7 @@
             </a:ln>
             <a:extLst>
               <a:ext uri="{91240B29-F687-4f45-9708-019B960494DF}">
-                <a14:hiddenLine xmlns:p14="http://schemas.microsoft.com/office/powerpoint/2010/main" xmlns:a14="http://schemas.microsoft.com/office/drawing/2010/main" xmlns:a16="http://schemas.microsoft.com/office/drawing/2014/main" xmlns="" w="9525">
+                <a14:hiddenLine xmlns="" xmlns:a16="http://schemas.microsoft.com/office/drawing/2014/main" xmlns:a14="http://schemas.microsoft.com/office/drawing/2010/main" xmlns:p14="http://schemas.microsoft.com/office/powerpoint/2010/main" w="9525">
                   <a:solidFill>
                     <a:srgbClr val="000000"/>
                   </a:solidFill>
@@ -16021,7 +16020,7 @@
             </a:ln>
             <a:extLst>
               <a:ext uri="{91240B29-F687-4f45-9708-019B960494DF}">
-                <a14:hiddenLine xmlns:p14="http://schemas.microsoft.com/office/powerpoint/2010/main" xmlns:a14="http://schemas.microsoft.com/office/drawing/2010/main" xmlns:a16="http://schemas.microsoft.com/office/drawing/2014/main" xmlns="" w="9525">
+                <a14:hiddenLine xmlns="" xmlns:a16="http://schemas.microsoft.com/office/drawing/2014/main" xmlns:a14="http://schemas.microsoft.com/office/drawing/2010/main" xmlns:p14="http://schemas.microsoft.com/office/powerpoint/2010/main" w="9525">
                   <a:solidFill>
                     <a:srgbClr val="000000"/>
                   </a:solidFill>
@@ -16098,7 +16097,7 @@
             </a:ln>
             <a:extLst>
               <a:ext uri="{91240B29-F687-4f45-9708-019B960494DF}">
-                <a14:hiddenLine xmlns:p14="http://schemas.microsoft.com/office/powerpoint/2010/main" xmlns:a14="http://schemas.microsoft.com/office/drawing/2010/main" xmlns:a16="http://schemas.microsoft.com/office/drawing/2014/main" xmlns="" w="9525">
+                <a14:hiddenLine xmlns="" xmlns:a16="http://schemas.microsoft.com/office/drawing/2014/main" xmlns:a14="http://schemas.microsoft.com/office/drawing/2010/main" xmlns:p14="http://schemas.microsoft.com/office/powerpoint/2010/main" w="9525">
                   <a:solidFill>
                     <a:srgbClr val="000000"/>
                   </a:solidFill>
@@ -16203,7 +16202,7 @@
             </a:ln>
             <a:extLst>
               <a:ext uri="{91240B29-F687-4f45-9708-019B960494DF}">
-                <a14:hiddenLine xmlns:p14="http://schemas.microsoft.com/office/powerpoint/2010/main" xmlns:a14="http://schemas.microsoft.com/office/drawing/2010/main" xmlns:a16="http://schemas.microsoft.com/office/drawing/2014/main" xmlns="" w="9525">
+                <a14:hiddenLine xmlns="" xmlns:a16="http://schemas.microsoft.com/office/drawing/2014/main" xmlns:a14="http://schemas.microsoft.com/office/drawing/2010/main" xmlns:p14="http://schemas.microsoft.com/office/powerpoint/2010/main" w="9525">
                   <a:solidFill>
                     <a:srgbClr val="000000"/>
                   </a:solidFill>
@@ -16286,7 +16285,7 @@
             </a:ln>
             <a:extLst>
               <a:ext uri="{91240B29-F687-4f45-9708-019B960494DF}">
-                <a14:hiddenLine xmlns:p14="http://schemas.microsoft.com/office/powerpoint/2010/main" xmlns:a14="http://schemas.microsoft.com/office/drawing/2010/main" xmlns:a16="http://schemas.microsoft.com/office/drawing/2014/main" xmlns="" w="9525">
+                <a14:hiddenLine xmlns="" xmlns:a16="http://schemas.microsoft.com/office/drawing/2014/main" xmlns:a14="http://schemas.microsoft.com/office/drawing/2010/main" xmlns:p14="http://schemas.microsoft.com/office/powerpoint/2010/main" w="9525">
                   <a:solidFill>
                     <a:srgbClr val="000000"/>
                   </a:solidFill>
@@ -16363,7 +16362,7 @@
             </a:ln>
             <a:extLst>
               <a:ext uri="{91240B29-F687-4f45-9708-019B960494DF}">
-                <a14:hiddenLine xmlns:p14="http://schemas.microsoft.com/office/powerpoint/2010/main" xmlns:a14="http://schemas.microsoft.com/office/drawing/2010/main" xmlns:a16="http://schemas.microsoft.com/office/drawing/2014/main" xmlns="" w="9525">
+                <a14:hiddenLine xmlns="" xmlns:a16="http://schemas.microsoft.com/office/drawing/2014/main" xmlns:a14="http://schemas.microsoft.com/office/drawing/2010/main" xmlns:p14="http://schemas.microsoft.com/office/powerpoint/2010/main" w="9525">
                   <a:solidFill>
                     <a:srgbClr val="000000"/>
                   </a:solidFill>
@@ -16468,7 +16467,7 @@
             </a:ln>
             <a:extLst>
               <a:ext uri="{91240B29-F687-4f45-9708-019B960494DF}">
-                <a14:hiddenLine xmlns:p14="http://schemas.microsoft.com/office/powerpoint/2010/main" xmlns:a14="http://schemas.microsoft.com/office/drawing/2010/main" xmlns:a16="http://schemas.microsoft.com/office/drawing/2014/main" xmlns="" w="9525">
+                <a14:hiddenLine xmlns="" xmlns:a16="http://schemas.microsoft.com/office/drawing/2014/main" xmlns:a14="http://schemas.microsoft.com/office/drawing/2010/main" xmlns:p14="http://schemas.microsoft.com/office/powerpoint/2010/main" w="9525">
                   <a:solidFill>
                     <a:srgbClr val="000000"/>
                   </a:solidFill>
@@ -16545,7 +16544,7 @@
             </a:ln>
             <a:extLst>
               <a:ext uri="{91240B29-F687-4f45-9708-019B960494DF}">
-                <a14:hiddenLine xmlns:p14="http://schemas.microsoft.com/office/powerpoint/2010/main" xmlns:a14="http://schemas.microsoft.com/office/drawing/2010/main" xmlns:a16="http://schemas.microsoft.com/office/drawing/2014/main" xmlns="" w="9525">
+                <a14:hiddenLine xmlns="" xmlns:a16="http://schemas.microsoft.com/office/drawing/2014/main" xmlns:a14="http://schemas.microsoft.com/office/drawing/2010/main" xmlns:p14="http://schemas.microsoft.com/office/powerpoint/2010/main" w="9525">
                   <a:solidFill>
                     <a:srgbClr val="000000"/>
                   </a:solidFill>
@@ -16650,7 +16649,7 @@
             </a:ln>
             <a:extLst>
               <a:ext uri="{91240B29-F687-4f45-9708-019B960494DF}">
-                <a14:hiddenLine xmlns:p14="http://schemas.microsoft.com/office/powerpoint/2010/main" xmlns:a14="http://schemas.microsoft.com/office/drawing/2010/main" xmlns:a16="http://schemas.microsoft.com/office/drawing/2014/main" xmlns="" w="9525">
+                <a14:hiddenLine xmlns="" xmlns:a16="http://schemas.microsoft.com/office/drawing/2014/main" xmlns:a14="http://schemas.microsoft.com/office/drawing/2010/main" xmlns:p14="http://schemas.microsoft.com/office/powerpoint/2010/main" w="9525">
                   <a:solidFill>
                     <a:srgbClr val="000000"/>
                   </a:solidFill>
@@ -16727,7 +16726,7 @@
             </a:ln>
             <a:extLst>
               <a:ext uri="{91240B29-F687-4f45-9708-019B960494DF}">
-                <a14:hiddenLine xmlns:p14="http://schemas.microsoft.com/office/powerpoint/2010/main" xmlns:a14="http://schemas.microsoft.com/office/drawing/2010/main" xmlns:a16="http://schemas.microsoft.com/office/drawing/2014/main" xmlns="" w="9525">
+                <a14:hiddenLine xmlns="" xmlns:a16="http://schemas.microsoft.com/office/drawing/2014/main" xmlns:a14="http://schemas.microsoft.com/office/drawing/2010/main" xmlns:p14="http://schemas.microsoft.com/office/powerpoint/2010/main" w="9525">
                   <a:solidFill>
                     <a:srgbClr val="000000"/>
                   </a:solidFill>
@@ -16832,7 +16831,7 @@
             </a:ln>
             <a:extLst>
               <a:ext uri="{91240B29-F687-4f45-9708-019B960494DF}">
-                <a14:hiddenLine xmlns:p14="http://schemas.microsoft.com/office/powerpoint/2010/main" xmlns:a14="http://schemas.microsoft.com/office/drawing/2010/main" xmlns:a16="http://schemas.microsoft.com/office/drawing/2014/main" xmlns="" w="9525">
+                <a14:hiddenLine xmlns="" xmlns:a16="http://schemas.microsoft.com/office/drawing/2014/main" xmlns:a14="http://schemas.microsoft.com/office/drawing/2010/main" xmlns:p14="http://schemas.microsoft.com/office/powerpoint/2010/main" w="9525">
                   <a:solidFill>
                     <a:srgbClr val="000000"/>
                   </a:solidFill>
@@ -16881,7 +16880,7 @@
             </a:ln>
             <a:extLst>
               <a:ext uri="{91240B29-F687-4f45-9708-019B960494DF}">
-                <a14:hiddenLine xmlns:p14="http://schemas.microsoft.com/office/powerpoint/2010/main" xmlns:a14="http://schemas.microsoft.com/office/drawing/2010/main" xmlns:a16="http://schemas.microsoft.com/office/drawing/2014/main" xmlns="" w="9525">
+                <a14:hiddenLine xmlns="" xmlns:a16="http://schemas.microsoft.com/office/drawing/2014/main" xmlns:a14="http://schemas.microsoft.com/office/drawing/2010/main" xmlns:p14="http://schemas.microsoft.com/office/powerpoint/2010/main" w="9525">
                   <a:solidFill>
                     <a:srgbClr val="000000"/>
                   </a:solidFill>
@@ -16961,7 +16960,7 @@
             </a:ln>
             <a:extLst>
               <a:ext uri="{91240B29-F687-4f45-9708-019B960494DF}">
-                <a14:hiddenLine xmlns:p14="http://schemas.microsoft.com/office/powerpoint/2010/main" xmlns:a14="http://schemas.microsoft.com/office/drawing/2010/main" xmlns:a16="http://schemas.microsoft.com/office/drawing/2014/main" xmlns="" w="9525">
+                <a14:hiddenLine xmlns="" xmlns:a16="http://schemas.microsoft.com/office/drawing/2014/main" xmlns:a14="http://schemas.microsoft.com/office/drawing/2010/main" xmlns:p14="http://schemas.microsoft.com/office/powerpoint/2010/main" w="9525">
                   <a:solidFill>
                     <a:srgbClr val="000000"/>
                   </a:solidFill>
@@ -17066,7 +17065,7 @@
             </a:ln>
             <a:extLst>
               <a:ext uri="{91240B29-F687-4f45-9708-019B960494DF}">
-                <a14:hiddenLine xmlns:p14="http://schemas.microsoft.com/office/powerpoint/2010/main" xmlns:a14="http://schemas.microsoft.com/office/drawing/2010/main" xmlns:a16="http://schemas.microsoft.com/office/drawing/2014/main" xmlns="" w="9525">
+                <a14:hiddenLine xmlns="" xmlns:a16="http://schemas.microsoft.com/office/drawing/2014/main" xmlns:a14="http://schemas.microsoft.com/office/drawing/2010/main" xmlns:p14="http://schemas.microsoft.com/office/powerpoint/2010/main" w="9525">
                   <a:solidFill>
                     <a:srgbClr val="000000"/>
                   </a:solidFill>
@@ -17143,7 +17142,7 @@
             </a:ln>
             <a:extLst>
               <a:ext uri="{91240B29-F687-4f45-9708-019B960494DF}">
-                <a14:hiddenLine xmlns:p14="http://schemas.microsoft.com/office/powerpoint/2010/main" xmlns:a14="http://schemas.microsoft.com/office/drawing/2010/main" xmlns:a16="http://schemas.microsoft.com/office/drawing/2014/main" xmlns="" w="9525">
+                <a14:hiddenLine xmlns="" xmlns:a16="http://schemas.microsoft.com/office/drawing/2014/main" xmlns:a14="http://schemas.microsoft.com/office/drawing/2010/main" xmlns:p14="http://schemas.microsoft.com/office/powerpoint/2010/main" w="9525">
                   <a:solidFill>
                     <a:srgbClr val="000000"/>
                   </a:solidFill>
@@ -17248,7 +17247,7 @@
             </a:ln>
             <a:extLst>
               <a:ext uri="{91240B29-F687-4f45-9708-019B960494DF}">
-                <a14:hiddenLine xmlns:p14="http://schemas.microsoft.com/office/powerpoint/2010/main" xmlns:a14="http://schemas.microsoft.com/office/drawing/2010/main" xmlns:a16="http://schemas.microsoft.com/office/drawing/2014/main" xmlns="" w="9525">
+                <a14:hiddenLine xmlns="" xmlns:a16="http://schemas.microsoft.com/office/drawing/2014/main" xmlns:a14="http://schemas.microsoft.com/office/drawing/2010/main" xmlns:p14="http://schemas.microsoft.com/office/powerpoint/2010/main" w="9525">
                   <a:solidFill>
                     <a:srgbClr val="000000"/>
                   </a:solidFill>
@@ -17353,7 +17352,7 @@
             </a:ln>
             <a:extLst>
               <a:ext uri="{91240B29-F687-4f45-9708-019B960494DF}">
-                <a14:hiddenLine xmlns:p14="http://schemas.microsoft.com/office/powerpoint/2010/main" xmlns:a14="http://schemas.microsoft.com/office/drawing/2010/main" xmlns:a16="http://schemas.microsoft.com/office/drawing/2014/main" xmlns="" w="9525">
+                <a14:hiddenLine xmlns="" xmlns:a16="http://schemas.microsoft.com/office/drawing/2014/main" xmlns:a14="http://schemas.microsoft.com/office/drawing/2010/main" xmlns:p14="http://schemas.microsoft.com/office/powerpoint/2010/main" w="9525">
                   <a:solidFill>
                     <a:srgbClr val="000000"/>
                   </a:solidFill>
@@ -17433,7 +17432,7 @@
             </a:ln>
             <a:extLst>
               <a:ext uri="{91240B29-F687-4f45-9708-019B960494DF}">
-                <a14:hiddenLine xmlns:p14="http://schemas.microsoft.com/office/powerpoint/2010/main" xmlns:a14="http://schemas.microsoft.com/office/drawing/2010/main" xmlns:a16="http://schemas.microsoft.com/office/drawing/2014/main" xmlns="" w="9525">
+                <a14:hiddenLine xmlns="" xmlns:a16="http://schemas.microsoft.com/office/drawing/2014/main" xmlns:a14="http://schemas.microsoft.com/office/drawing/2010/main" xmlns:p14="http://schemas.microsoft.com/office/powerpoint/2010/main" w="9525">
                   <a:solidFill>
                     <a:srgbClr val="000000"/>
                   </a:solidFill>
@@ -17510,7 +17509,7 @@
             </a:ln>
             <a:extLst>
               <a:ext uri="{91240B29-F687-4f45-9708-019B960494DF}">
-                <a14:hiddenLine xmlns:p14="http://schemas.microsoft.com/office/powerpoint/2010/main" xmlns:a14="http://schemas.microsoft.com/office/drawing/2010/main" xmlns:a16="http://schemas.microsoft.com/office/drawing/2014/main" xmlns="" w="9525">
+                <a14:hiddenLine xmlns="" xmlns:a16="http://schemas.microsoft.com/office/drawing/2014/main" xmlns:a14="http://schemas.microsoft.com/office/drawing/2010/main" xmlns:p14="http://schemas.microsoft.com/office/powerpoint/2010/main" w="9525">
                   <a:solidFill>
                     <a:srgbClr val="000000"/>
                   </a:solidFill>
@@ -17615,7 +17614,7 @@
             </a:ln>
             <a:extLst>
               <a:ext uri="{91240B29-F687-4f45-9708-019B960494DF}">
-                <a14:hiddenLine xmlns:p14="http://schemas.microsoft.com/office/powerpoint/2010/main" xmlns:a14="http://schemas.microsoft.com/office/drawing/2010/main" xmlns:a16="http://schemas.microsoft.com/office/drawing/2014/main" xmlns="" w="9525">
+                <a14:hiddenLine xmlns="" xmlns:a16="http://schemas.microsoft.com/office/drawing/2014/main" xmlns:a14="http://schemas.microsoft.com/office/drawing/2010/main" xmlns:p14="http://schemas.microsoft.com/office/powerpoint/2010/main" w="9525">
                   <a:solidFill>
                     <a:srgbClr val="000000"/>
                   </a:solidFill>
@@ -17720,7 +17719,7 @@
             </a:ln>
             <a:extLst>
               <a:ext uri="{91240B29-F687-4f45-9708-019B960494DF}">
-                <a14:hiddenLine xmlns:p14="http://schemas.microsoft.com/office/powerpoint/2010/main" xmlns:a14="http://schemas.microsoft.com/office/drawing/2010/main" xmlns:a16="http://schemas.microsoft.com/office/drawing/2014/main" xmlns="" w="9525">
+                <a14:hiddenLine xmlns="" xmlns:a16="http://schemas.microsoft.com/office/drawing/2014/main" xmlns:a14="http://schemas.microsoft.com/office/drawing/2010/main" xmlns:p14="http://schemas.microsoft.com/office/powerpoint/2010/main" w="9525">
                   <a:solidFill>
                     <a:srgbClr val="000000"/>
                   </a:solidFill>
@@ -17797,7 +17796,7 @@
             </a:ln>
             <a:extLst>
               <a:ext uri="{91240B29-F687-4f45-9708-019B960494DF}">
-                <a14:hiddenLine xmlns:p14="http://schemas.microsoft.com/office/powerpoint/2010/main" xmlns:a14="http://schemas.microsoft.com/office/drawing/2010/main" xmlns:a16="http://schemas.microsoft.com/office/drawing/2014/main" xmlns="" w="9525">
+                <a14:hiddenLine xmlns="" xmlns:a16="http://schemas.microsoft.com/office/drawing/2014/main" xmlns:a14="http://schemas.microsoft.com/office/drawing/2010/main" xmlns:p14="http://schemas.microsoft.com/office/powerpoint/2010/main" w="9525">
                   <a:solidFill>
                     <a:srgbClr val="000000"/>
                   </a:solidFill>
@@ -17932,7 +17931,7 @@
             </a:ln>
             <a:extLst>
               <a:ext uri="{91240B29-F687-4f45-9708-019B960494DF}">
-                <a14:hiddenLine xmlns:p14="http://schemas.microsoft.com/office/powerpoint/2010/main" xmlns:a14="http://schemas.microsoft.com/office/drawing/2010/main" xmlns:a16="http://schemas.microsoft.com/office/drawing/2014/main" xmlns="" w="9525">
+                <a14:hiddenLine xmlns="" xmlns:a16="http://schemas.microsoft.com/office/drawing/2014/main" xmlns:a14="http://schemas.microsoft.com/office/drawing/2010/main" xmlns:p14="http://schemas.microsoft.com/office/powerpoint/2010/main" w="9525">
                   <a:solidFill>
                     <a:srgbClr val="000000"/>
                   </a:solidFill>
@@ -18015,7 +18014,7 @@
             </a:ln>
             <a:extLst>
               <a:ext uri="{91240B29-F687-4f45-9708-019B960494DF}">
-                <a14:hiddenLine xmlns:p14="http://schemas.microsoft.com/office/powerpoint/2010/main" xmlns:a14="http://schemas.microsoft.com/office/drawing/2010/main" xmlns:a16="http://schemas.microsoft.com/office/drawing/2014/main" xmlns="" w="9525">
+                <a14:hiddenLine xmlns="" xmlns:a16="http://schemas.microsoft.com/office/drawing/2014/main" xmlns:a14="http://schemas.microsoft.com/office/drawing/2010/main" xmlns:p14="http://schemas.microsoft.com/office/powerpoint/2010/main" w="9525">
                   <a:solidFill>
                     <a:srgbClr val="000000"/>
                   </a:solidFill>
@@ -18120,7 +18119,7 @@
             </a:ln>
             <a:extLst>
               <a:ext uri="{91240B29-F687-4f45-9708-019B960494DF}">
-                <a14:hiddenLine xmlns:p14="http://schemas.microsoft.com/office/powerpoint/2010/main" xmlns:a14="http://schemas.microsoft.com/office/drawing/2010/main" xmlns:a16="http://schemas.microsoft.com/office/drawing/2014/main" xmlns="" w="9525">
+                <a14:hiddenLine xmlns="" xmlns:a16="http://schemas.microsoft.com/office/drawing/2014/main" xmlns:a14="http://schemas.microsoft.com/office/drawing/2010/main" xmlns:p14="http://schemas.microsoft.com/office/powerpoint/2010/main" w="9525">
                   <a:solidFill>
                     <a:srgbClr val="000000"/>
                   </a:solidFill>
@@ -18250,7 +18249,7 @@
             </a:ln>
             <a:extLst>
               <a:ext uri="{91240B29-F687-4f45-9708-019B960494DF}">
-                <a14:hiddenLine xmlns:p14="http://schemas.microsoft.com/office/powerpoint/2010/main" xmlns:a14="http://schemas.microsoft.com/office/drawing/2010/main" xmlns:a16="http://schemas.microsoft.com/office/drawing/2014/main" xmlns="" w="9525">
+                <a14:hiddenLine xmlns="" xmlns:a16="http://schemas.microsoft.com/office/drawing/2014/main" xmlns:a14="http://schemas.microsoft.com/office/drawing/2010/main" xmlns:p14="http://schemas.microsoft.com/office/powerpoint/2010/main" w="9525">
                   <a:solidFill>
                     <a:srgbClr val="000000"/>
                   </a:solidFill>
@@ -18380,7 +18379,7 @@
             </a:ln>
             <a:extLst>
               <a:ext uri="{91240B29-F687-4f45-9708-019B960494DF}">
-                <a14:hiddenLine xmlns:p14="http://schemas.microsoft.com/office/powerpoint/2010/main" xmlns:a14="http://schemas.microsoft.com/office/drawing/2010/main" xmlns:a16="http://schemas.microsoft.com/office/drawing/2014/main" xmlns="" w="9525">
+                <a14:hiddenLine xmlns="" xmlns:a16="http://schemas.microsoft.com/office/drawing/2014/main" xmlns:a14="http://schemas.microsoft.com/office/drawing/2010/main" xmlns:p14="http://schemas.microsoft.com/office/powerpoint/2010/main" w="9525">
                   <a:solidFill>
                     <a:srgbClr val="000000"/>
                   </a:solidFill>
@@ -18485,7 +18484,7 @@
             </a:ln>
             <a:extLst>
               <a:ext uri="{91240B29-F687-4f45-9708-019B960494DF}">
-                <a14:hiddenLine xmlns:p14="http://schemas.microsoft.com/office/powerpoint/2010/main" xmlns:a14="http://schemas.microsoft.com/office/drawing/2010/main" xmlns:a16="http://schemas.microsoft.com/office/drawing/2014/main" xmlns="" w="9525">
+                <a14:hiddenLine xmlns="" xmlns:a16="http://schemas.microsoft.com/office/drawing/2014/main" xmlns:a14="http://schemas.microsoft.com/office/drawing/2010/main" xmlns:p14="http://schemas.microsoft.com/office/powerpoint/2010/main" w="9525">
                   <a:solidFill>
                     <a:srgbClr val="000000"/>
                   </a:solidFill>
@@ -18565,7 +18564,7 @@
             </a:ln>
             <a:extLst>
               <a:ext uri="{91240B29-F687-4f45-9708-019B960494DF}">
-                <a14:hiddenLine xmlns:p14="http://schemas.microsoft.com/office/powerpoint/2010/main" xmlns:a14="http://schemas.microsoft.com/office/drawing/2010/main" xmlns:a16="http://schemas.microsoft.com/office/drawing/2014/main" xmlns="" w="9525">
+                <a14:hiddenLine xmlns="" xmlns:a16="http://schemas.microsoft.com/office/drawing/2014/main" xmlns:a14="http://schemas.microsoft.com/office/drawing/2010/main" xmlns:p14="http://schemas.microsoft.com/office/powerpoint/2010/main" w="9525">
                   <a:solidFill>
                     <a:srgbClr val="000000"/>
                   </a:solidFill>
@@ -18670,7 +18669,7 @@
             </a:ln>
             <a:extLst>
               <a:ext uri="{91240B29-F687-4f45-9708-019B960494DF}">
-                <a14:hiddenLine xmlns:p14="http://schemas.microsoft.com/office/powerpoint/2010/main" xmlns:a14="http://schemas.microsoft.com/office/drawing/2010/main" xmlns:a16="http://schemas.microsoft.com/office/drawing/2014/main" xmlns="" w="9525">
+                <a14:hiddenLine xmlns="" xmlns:a16="http://schemas.microsoft.com/office/drawing/2014/main" xmlns:a14="http://schemas.microsoft.com/office/drawing/2010/main" xmlns:p14="http://schemas.microsoft.com/office/powerpoint/2010/main" w="9525">
                   <a:solidFill>
                     <a:srgbClr val="000000"/>
                   </a:solidFill>
@@ -18753,7 +18752,7 @@
             </a:ln>
             <a:extLst>
               <a:ext uri="{91240B29-F687-4f45-9708-019B960494DF}">
-                <a14:hiddenLine xmlns:p14="http://schemas.microsoft.com/office/powerpoint/2010/main" xmlns:a14="http://schemas.microsoft.com/office/drawing/2010/main" xmlns:a16="http://schemas.microsoft.com/office/drawing/2014/main" xmlns="" w="9525">
+                <a14:hiddenLine xmlns="" xmlns:a16="http://schemas.microsoft.com/office/drawing/2014/main" xmlns:a14="http://schemas.microsoft.com/office/drawing/2010/main" xmlns:p14="http://schemas.microsoft.com/office/powerpoint/2010/main" w="9525">
                   <a:solidFill>
                     <a:srgbClr val="000000"/>
                   </a:solidFill>
@@ -18858,7 +18857,7 @@
             </a:ln>
             <a:extLst>
               <a:ext uri="{91240B29-F687-4f45-9708-019B960494DF}">
-                <a14:hiddenLine xmlns:p14="http://schemas.microsoft.com/office/powerpoint/2010/main" xmlns:a14="http://schemas.microsoft.com/office/drawing/2010/main" xmlns:a16="http://schemas.microsoft.com/office/drawing/2014/main" xmlns="" w="9525">
+                <a14:hiddenLine xmlns="" xmlns:a16="http://schemas.microsoft.com/office/drawing/2014/main" xmlns:a14="http://schemas.microsoft.com/office/drawing/2010/main" xmlns:p14="http://schemas.microsoft.com/office/powerpoint/2010/main" w="9525">
                   <a:solidFill>
                     <a:srgbClr val="000000"/>
                   </a:solidFill>
@@ -18941,7 +18940,7 @@
             </a:ln>
             <a:extLst>
               <a:ext uri="{91240B29-F687-4f45-9708-019B960494DF}">
-                <a14:hiddenLine xmlns:p14="http://schemas.microsoft.com/office/powerpoint/2010/main" xmlns:a14="http://schemas.microsoft.com/office/drawing/2010/main" xmlns:a16="http://schemas.microsoft.com/office/drawing/2014/main" xmlns="" w="9525">
+                <a14:hiddenLine xmlns="" xmlns:a16="http://schemas.microsoft.com/office/drawing/2014/main" xmlns:a14="http://schemas.microsoft.com/office/drawing/2010/main" xmlns:p14="http://schemas.microsoft.com/office/powerpoint/2010/main" w="9525">
                   <a:solidFill>
                     <a:srgbClr val="000000"/>
                   </a:solidFill>
@@ -19046,7 +19045,7 @@
             </a:ln>
             <a:extLst>
               <a:ext uri="{91240B29-F687-4f45-9708-019B960494DF}">
-                <a14:hiddenLine xmlns:p14="http://schemas.microsoft.com/office/powerpoint/2010/main" xmlns:a14="http://schemas.microsoft.com/office/drawing/2010/main" xmlns:a16="http://schemas.microsoft.com/office/drawing/2014/main" xmlns="" w="9525">
+                <a14:hiddenLine xmlns="" xmlns:a16="http://schemas.microsoft.com/office/drawing/2014/main" xmlns:a14="http://schemas.microsoft.com/office/drawing/2010/main" xmlns:p14="http://schemas.microsoft.com/office/powerpoint/2010/main" w="9525">
                   <a:solidFill>
                     <a:srgbClr val="000000"/>
                   </a:solidFill>
@@ -19095,7 +19094,7 @@
             </a:ln>
             <a:extLst>
               <a:ext uri="{91240B29-F687-4f45-9708-019B960494DF}">
-                <a14:hiddenLine xmlns:p14="http://schemas.microsoft.com/office/powerpoint/2010/main" xmlns:a14="http://schemas.microsoft.com/office/drawing/2010/main" xmlns:a16="http://schemas.microsoft.com/office/drawing/2014/main" xmlns="" w="9525">
+                <a14:hiddenLine xmlns="" xmlns:a16="http://schemas.microsoft.com/office/drawing/2014/main" xmlns:a14="http://schemas.microsoft.com/office/drawing/2010/main" xmlns:p14="http://schemas.microsoft.com/office/powerpoint/2010/main" w="9525">
                   <a:solidFill>
                     <a:srgbClr val="000000"/>
                   </a:solidFill>
@@ -19248,184 +19247,6 @@
         </p:nvSpPr>
         <p:spPr>
           <a:xfrm>
-            <a:off x="1143000" y="146102"/>
-            <a:ext cx="10515600" cy="1325563"/>
-          </a:xfrm>
-        </p:spPr>
-        <p:txBody>
-          <a:bodyPr/>
-          <a:lstStyle/>
-          <a:p>
-            <a:r>
-              <a:rPr lang="en-US"/>
-              <a:t>lists</a:t>
-            </a:r>
-          </a:p>
-        </p:txBody>
-      </p:sp>
-      <p:sp>
-        <p:nvSpPr>
-          <p:cNvPr id="6" name="Content Placeholder 5">
-            <a:extLst>
-              <a:ext uri="{FF2B5EF4-FFF2-40B4-BE49-F238E27FC236}">
-                <a16:creationId xmlns:a16="http://schemas.microsoft.com/office/drawing/2014/main" id="{FDB60DBF-F433-4057-85ED-960E10BB18C1}"/>
-              </a:ext>
-            </a:extLst>
-          </p:cNvPr>
-          <p:cNvSpPr>
-            <a:spLocks noGrp="1"/>
-          </p:cNvSpPr>
-          <p:nvPr>
-            <p:ph idx="1"/>
-          </p:nvPr>
-        </p:nvSpPr>
-        <p:spPr>
-          <a:xfrm>
-            <a:off x="1143892" y="1495044"/>
-            <a:ext cx="7729728" cy="4802543"/>
-          </a:xfrm>
-        </p:spPr>
-        <p:txBody>
-          <a:bodyPr vert="horz" lIns="91440" tIns="45720" rIns="91440" bIns="45720" rtlCol="0" anchor="t">
-            <a:normAutofit/>
-          </a:bodyPr>
-          <a:lstStyle/>
-          <a:p>
-            <a:r>
-              <a:rPr lang="en-US" dirty="0"/>
-              <a:t>Modifying Elements</a:t>
-            </a:r>
-          </a:p>
-          <a:p>
-            <a:pPr lvl="1"/>
-            <a:r>
-              <a:rPr lang="en-US" dirty="0"/>
-              <a:t>To change an element in a list, assign the new element to the index of the element you want to change</a:t>
-            </a:r>
-          </a:p>
-          <a:p>
-            <a:pPr lvl="2"/>
-            <a:r>
-              <a:rPr lang="en-US" dirty="0">
-                <a:highlight>
-                  <a:srgbClr val="000000"/>
-                </a:highlight>
-              </a:rPr>
-              <a:t>names[0] = 'Amy'   #used to be 'Will'</a:t>
-            </a:r>
-          </a:p>
-          <a:p>
-            <a:r>
-              <a:rPr lang="en-US" dirty="0"/>
-              <a:t>Adding Elements</a:t>
-            </a:r>
-          </a:p>
-          <a:p>
-            <a:pPr lvl="1"/>
-            <a:r>
-              <a:rPr lang="en-US" dirty="0"/>
-              <a:t>.append(element) - Adds element to end of list</a:t>
-            </a:r>
-          </a:p>
-          <a:p>
-            <a:pPr lvl="1"/>
-            <a:r>
-              <a:rPr lang="en-US" dirty="0"/>
-              <a:t>.insert(</a:t>
-            </a:r>
-            <a:r>
-              <a:rPr lang="en-US" dirty="0" err="1"/>
-              <a:t>idx</a:t>
-            </a:r>
-            <a:r>
-              <a:rPr lang="en-US" dirty="0"/>
-              <a:t>, element) - Adds element at desired index while moving elements after index to the right (think current index + 1)</a:t>
-            </a:r>
-          </a:p>
-          <a:p>
-            <a:pPr lvl="1"/>
-            <a:endParaRPr lang="en-US" dirty="0"/>
-          </a:p>
-        </p:txBody>
-      </p:sp>
-      <p:pic>
-        <p:nvPicPr>
-          <p:cNvPr id="4" name="Picture 4" descr="A close up of a sign&#10;&#10;Description automatically generated">
-            <a:extLst>
-              <a:ext uri="{FF2B5EF4-FFF2-40B4-BE49-F238E27FC236}">
-                <a16:creationId xmlns:a16="http://schemas.microsoft.com/office/drawing/2014/main" id="{6E648EE6-D4BA-4C03-9199-CD5E82CDC43C}"/>
-              </a:ext>
-            </a:extLst>
-          </p:cNvPr>
-          <p:cNvPicPr>
-            <a:picLocks noChangeAspect="1"/>
-          </p:cNvPicPr>
-          <p:nvPr/>
-        </p:nvPicPr>
-        <p:blipFill>
-          <a:blip r:embed="rId2"/>
-          <a:stretch>
-            <a:fillRect/>
-          </a:stretch>
-        </p:blipFill>
-        <p:spPr>
-          <a:xfrm>
-            <a:off x="3746810" y="4998089"/>
-            <a:ext cx="5306520" cy="1859911"/>
-          </a:xfrm>
-          <a:prstGeom prst="rect">
-            <a:avLst/>
-          </a:prstGeom>
-        </p:spPr>
-      </p:pic>
-    </p:spTree>
-    <p:extLst>
-      <p:ext uri="{BB962C8B-B14F-4D97-AF65-F5344CB8AC3E}">
-        <p14:creationId xmlns:p14="http://schemas.microsoft.com/office/powerpoint/2010/main" val="1784549319"/>
-      </p:ext>
-    </p:extLst>
-  </p:cSld>
-  <p:clrMapOvr>
-    <a:masterClrMapping/>
-  </p:clrMapOvr>
-</p:sld>
-</file>
-
-<file path=ppt/slides/slide11.xml><?xml version="1.0" encoding="utf-8"?>
-<p:sld xmlns:a="http://schemas.openxmlformats.org/drawingml/2006/main" xmlns:r="http://schemas.openxmlformats.org/officeDocument/2006/relationships" xmlns:p="http://schemas.openxmlformats.org/presentationml/2006/main">
-  <p:cSld>
-    <p:spTree>
-      <p:nvGrpSpPr>
-        <p:cNvPr id="1" name=""/>
-        <p:cNvGrpSpPr/>
-        <p:nvPr/>
-      </p:nvGrpSpPr>
-      <p:grpSpPr>
-        <a:xfrm>
-          <a:off x="0" y="0"/>
-          <a:ext cx="0" cy="0"/>
-          <a:chOff x="0" y="0"/>
-          <a:chExt cx="0" cy="0"/>
-        </a:xfrm>
-      </p:grpSpPr>
-      <p:sp>
-        <p:nvSpPr>
-          <p:cNvPr id="2" name="Title 1">
-            <a:extLst>
-              <a:ext uri="{FF2B5EF4-FFF2-40B4-BE49-F238E27FC236}">
-                <a16:creationId xmlns:a16="http://schemas.microsoft.com/office/drawing/2014/main" id="{089AB04D-874D-0245-A562-02212EE48CA7}"/>
-              </a:ext>
-            </a:extLst>
-          </p:cNvPr>
-          <p:cNvSpPr>
-            <a:spLocks noGrp="1"/>
-          </p:cNvSpPr>
-          <p:nvPr>
-            <p:ph type="title"/>
-          </p:nvPr>
-        </p:nvSpPr>
-        <p:spPr>
-          <a:xfrm>
             <a:off x="1143499" y="163050"/>
             <a:ext cx="10515600" cy="1325563"/>
           </a:xfrm>
@@ -19563,7 +19384,7 @@
 </p:sld>
 </file>
 
-<file path=ppt/slides/slide12.xml><?xml version="1.0" encoding="utf-8"?>
+<file path=ppt/slides/slide11.xml><?xml version="1.0" encoding="utf-8"?>
 <p:sld xmlns:a="http://schemas.openxmlformats.org/drawingml/2006/main" xmlns:r="http://schemas.openxmlformats.org/officeDocument/2006/relationships" xmlns:p="http://schemas.openxmlformats.org/presentationml/2006/main">
   <p:cSld>
     <p:spTree>
@@ -19725,7 +19546,7 @@
 </p:sld>
 </file>
 
-<file path=ppt/slides/slide13.xml><?xml version="1.0" encoding="utf-8"?>
+<file path=ppt/slides/slide12.xml><?xml version="1.0" encoding="utf-8"?>
 <p:sld xmlns:a="http://schemas.openxmlformats.org/drawingml/2006/main" xmlns:r="http://schemas.openxmlformats.org/officeDocument/2006/relationships" xmlns:p="http://schemas.openxmlformats.org/presentationml/2006/main">
   <p:cSld>
     <p:spTree>
@@ -19925,6 +19746,206 @@
 </p:sld>
 </file>
 
+<file path=ppt/slides/slide13.xml><?xml version="1.0" encoding="utf-8"?>
+<p:sld xmlns:a="http://schemas.openxmlformats.org/drawingml/2006/main" xmlns:r="http://schemas.openxmlformats.org/officeDocument/2006/relationships" xmlns:p="http://schemas.openxmlformats.org/presentationml/2006/main">
+  <p:cSld>
+    <p:spTree>
+      <p:nvGrpSpPr>
+        <p:cNvPr id="1" name=""/>
+        <p:cNvGrpSpPr/>
+        <p:nvPr/>
+      </p:nvGrpSpPr>
+      <p:grpSpPr>
+        <a:xfrm>
+          <a:off x="0" y="0"/>
+          <a:ext cx="0" cy="0"/>
+          <a:chOff x="0" y="0"/>
+          <a:chExt cx="0" cy="0"/>
+        </a:xfrm>
+      </p:grpSpPr>
+      <p:sp>
+        <p:nvSpPr>
+          <p:cNvPr id="2" name="Title 1">
+            <a:extLst>
+              <a:ext uri="{FF2B5EF4-FFF2-40B4-BE49-F238E27FC236}">
+                <a16:creationId xmlns:a16="http://schemas.microsoft.com/office/drawing/2014/main" id="{089AB04D-874D-0245-A562-02212EE48CA7}"/>
+              </a:ext>
+            </a:extLst>
+          </p:cNvPr>
+          <p:cNvSpPr>
+            <a:spLocks noGrp="1"/>
+          </p:cNvSpPr>
+          <p:nvPr>
+            <p:ph type="title"/>
+          </p:nvPr>
+        </p:nvSpPr>
+        <p:spPr>
+          <a:xfrm>
+            <a:off x="1143499" y="163050"/>
+            <a:ext cx="10515600" cy="1325563"/>
+          </a:xfrm>
+        </p:spPr>
+        <p:txBody>
+          <a:bodyPr/>
+          <a:lstStyle/>
+          <a:p>
+            <a:r>
+              <a:rPr lang="en-US"/>
+              <a:t>Lists</a:t>
+            </a:r>
+            <a:endParaRPr lang="en-US" dirty="0"/>
+          </a:p>
+        </p:txBody>
+      </p:sp>
+      <p:sp>
+        <p:nvSpPr>
+          <p:cNvPr id="3" name="Content Placeholder 2">
+            <a:extLst>
+              <a:ext uri="{FF2B5EF4-FFF2-40B4-BE49-F238E27FC236}">
+                <a16:creationId xmlns:a16="http://schemas.microsoft.com/office/drawing/2014/main" id="{3713A5A2-1019-0143-BC00-1B8B12D7C198}"/>
+              </a:ext>
+            </a:extLst>
+          </p:cNvPr>
+          <p:cNvSpPr>
+            <a:spLocks noGrp="1"/>
+          </p:cNvSpPr>
+          <p:nvPr>
+            <p:ph idx="1"/>
+          </p:nvPr>
+        </p:nvSpPr>
+        <p:spPr>
+          <a:xfrm>
+            <a:off x="1143499" y="1488613"/>
+            <a:ext cx="8596668" cy="3880773"/>
+          </a:xfrm>
+        </p:spPr>
+        <p:txBody>
+          <a:bodyPr vert="horz" lIns="91440" tIns="45720" rIns="91440" bIns="45720" rtlCol="0" anchor="t">
+            <a:normAutofit/>
+          </a:bodyPr>
+          <a:lstStyle/>
+          <a:p>
+            <a:r>
+              <a:rPr lang="en-US"/>
+              <a:t>Helpful built-in functions</a:t>
+            </a:r>
+            <a:endParaRPr lang="en-US" dirty="0"/>
+          </a:p>
+          <a:p>
+            <a:pPr lvl="1"/>
+            <a:r>
+              <a:rPr lang="en-US" dirty="0" err="1"/>
+              <a:t>len</a:t>
+            </a:r>
+            <a:r>
+              <a:rPr lang="en-US" dirty="0"/>
+              <a:t>() - returns integer number of elements in </a:t>
+            </a:r>
+            <a:r>
+              <a:rPr lang="en-US"/>
+              <a:t>an list</a:t>
+            </a:r>
+            <a:endParaRPr lang="en-US" dirty="0"/>
+          </a:p>
+          <a:p>
+            <a:pPr lvl="2"/>
+            <a:r>
+              <a:rPr lang="en-US"/>
+              <a:t>Unlike list </a:t>
+            </a:r>
+            <a:r>
+              <a:rPr lang="en-US" dirty="0"/>
+              <a:t>indexes, this does not start at 0, it starts at 1</a:t>
+            </a:r>
+          </a:p>
+          <a:p>
+            <a:pPr lvl="3"/>
+            <a:r>
+              <a:rPr lang="en-US" dirty="0">
+                <a:highlight>
+                  <a:srgbClr val="000000"/>
+                </a:highlight>
+              </a:rPr>
+              <a:t> </a:t>
+            </a:r>
+            <a:r>
+              <a:rPr lang="en-US" dirty="0" err="1">
+                <a:highlight>
+                  <a:srgbClr val="000000"/>
+                </a:highlight>
+              </a:rPr>
+              <a:t>len</a:t>
+            </a:r>
+            <a:r>
+              <a:rPr lang="en-US" dirty="0">
+                <a:highlight>
+                  <a:srgbClr val="000000"/>
+                </a:highlight>
+              </a:rPr>
+              <a:t>( ['will', 'bob', '</a:t>
+            </a:r>
+            <a:r>
+              <a:rPr lang="en-US" dirty="0" err="1">
+                <a:highlight>
+                  <a:srgbClr val="000000"/>
+                </a:highlight>
+              </a:rPr>
+              <a:t>susan</a:t>
+            </a:r>
+            <a:r>
+              <a:rPr lang="en-US" dirty="0">
+                <a:highlight>
+                  <a:srgbClr val="000000"/>
+                </a:highlight>
+              </a:rPr>
+              <a:t>’] )  </a:t>
+            </a:r>
+            <a:r>
+              <a:rPr lang="en-US" dirty="0"/>
+              <a:t>will </a:t>
+            </a:r>
+            <a:r>
+              <a:rPr lang="en-US"/>
+              <a:t>return 3</a:t>
+            </a:r>
+          </a:p>
+          <a:p>
+            <a:pPr lvl="1"/>
+            <a:r>
+              <a:rPr lang="en-US"/>
+              <a:t>sum() – returns the cumulative total of integer or float list</a:t>
+            </a:r>
+          </a:p>
+          <a:p>
+            <a:pPr lvl="1"/>
+            <a:r>
+              <a:rPr lang="en-US"/>
+              <a:t>min() – returns the minimum value of a list</a:t>
+            </a:r>
+          </a:p>
+          <a:p>
+            <a:pPr lvl="1"/>
+            <a:r>
+              <a:rPr lang="en-US"/>
+              <a:t>max() – returns the maximum value of a list</a:t>
+            </a:r>
+            <a:endParaRPr lang="en-US" dirty="0"/>
+          </a:p>
+        </p:txBody>
+      </p:sp>
+    </p:spTree>
+    <p:extLst>
+      <p:ext uri="{BB962C8B-B14F-4D97-AF65-F5344CB8AC3E}">
+        <p14:creationId xmlns:p14="http://schemas.microsoft.com/office/powerpoint/2010/main" val="3068982192"/>
+      </p:ext>
+    </p:extLst>
+  </p:cSld>
+  <p:clrMapOvr>
+    <a:masterClrMapping/>
+  </p:clrMapOvr>
+</p:sld>
+</file>
+
 <file path=ppt/slides/slide14.xml><?xml version="1.0" encoding="utf-8"?>
 <p:sld xmlns:a="http://schemas.openxmlformats.org/drawingml/2006/main" xmlns:r="http://schemas.openxmlformats.org/officeDocument/2006/relationships" xmlns:p="http://schemas.openxmlformats.org/presentationml/2006/main">
   <p:cSld>
@@ -20005,108 +20026,64 @@
           <a:lstStyle/>
           <a:p>
             <a:r>
-              <a:rPr lang="en-US"/>
-              <a:t>Helpful built-in functions</a:t>
-            </a:r>
-            <a:endParaRPr lang="en-US" dirty="0"/>
+              <a:rPr lang="en-US" dirty="0"/>
+              <a:t>Slicing</a:t>
+            </a:r>
           </a:p>
           <a:p>
             <a:pPr lvl="1"/>
             <a:r>
-              <a:rPr lang="en-US" dirty="0" err="1"/>
-              <a:t>len</a:t>
-            </a:r>
-            <a:r>
               <a:rPr lang="en-US" dirty="0"/>
-              <a:t>() - returns integer number of elements in an array</a:t>
-            </a:r>
-          </a:p>
-          <a:p>
-            <a:pPr lvl="2"/>
+              <a:t>Syntax uses square brackets, with the first value being the start index, and the second value being the end index (non-inclusive)</a:t>
+            </a:r>
+          </a:p>
+          <a:p>
+            <a:pPr lvl="1"/>
             <a:r>
               <a:rPr lang="en-US" dirty="0"/>
-              <a:t>Unlike array indexes, this does not start at 0, it starts at 1</a:t>
-            </a:r>
-          </a:p>
-          <a:p>
-            <a:pPr lvl="3"/>
-            <a:r>
-              <a:rPr lang="en-US" dirty="0">
-                <a:highlight>
-                  <a:srgbClr val="000000"/>
-                </a:highlight>
-              </a:rPr>
-              <a:t> </a:t>
-            </a:r>
-            <a:r>
-              <a:rPr lang="en-US" dirty="0" err="1">
-                <a:highlight>
-                  <a:srgbClr val="000000"/>
-                </a:highlight>
-              </a:rPr>
-              <a:t>len</a:t>
-            </a:r>
-            <a:r>
-              <a:rPr lang="en-US" dirty="0">
-                <a:highlight>
-                  <a:srgbClr val="000000"/>
-                </a:highlight>
-              </a:rPr>
-              <a:t>( ['will', 'bob', '</a:t>
-            </a:r>
-            <a:r>
-              <a:rPr lang="en-US" dirty="0" err="1">
-                <a:highlight>
-                  <a:srgbClr val="000000"/>
-                </a:highlight>
-              </a:rPr>
-              <a:t>susan</a:t>
-            </a:r>
-            <a:r>
-              <a:rPr lang="en-US" dirty="0">
-                <a:highlight>
-                  <a:srgbClr val="000000"/>
-                </a:highlight>
-              </a:rPr>
-              <a:t>’] )  </a:t>
-            </a:r>
-            <a:r>
-              <a:rPr lang="en-US" dirty="0"/>
-              <a:t>will </a:t>
-            </a:r>
-            <a:r>
-              <a:rPr lang="en-US"/>
-              <a:t>return 3</a:t>
+              <a:t>The start and/or end can be excluded and the interpreter will start from the beginning or end at the last index</a:t>
             </a:r>
           </a:p>
           <a:p>
             <a:pPr lvl="1"/>
-            <a:r>
-              <a:rPr lang="en-US"/>
-              <a:t>sum() – returns the cumulative total of integer or float list</a:t>
-            </a:r>
-          </a:p>
-          <a:p>
-            <a:pPr lvl="1"/>
-            <a:r>
-              <a:rPr lang="en-US"/>
-              <a:t>min() – returns the minimum value of a list</a:t>
-            </a:r>
-          </a:p>
-          <a:p>
-            <a:pPr lvl="1"/>
-            <a:r>
-              <a:rPr lang="en-US"/>
-              <a:t>max() – returns the maximum value of a list</a:t>
-            </a:r>
             <a:endParaRPr lang="en-US" dirty="0"/>
           </a:p>
         </p:txBody>
       </p:sp>
+      <p:pic>
+        <p:nvPicPr>
+          <p:cNvPr id="4" name="Picture 4" descr="A close up of text on a black background&#10;&#10;Description automatically generated">
+            <a:extLst>
+              <a:ext uri="{FF2B5EF4-FFF2-40B4-BE49-F238E27FC236}">
+                <a16:creationId xmlns:a16="http://schemas.microsoft.com/office/drawing/2014/main" id="{0AAB46F1-32FF-49EB-85F0-DC9919487A99}"/>
+              </a:ext>
+            </a:extLst>
+          </p:cNvPr>
+          <p:cNvPicPr>
+            <a:picLocks noChangeAspect="1"/>
+          </p:cNvPicPr>
+          <p:nvPr/>
+        </p:nvPicPr>
+        <p:blipFill>
+          <a:blip r:embed="rId2"/>
+          <a:stretch>
+            <a:fillRect/>
+          </a:stretch>
+        </p:blipFill>
+        <p:spPr>
+          <a:xfrm>
+            <a:off x="5716858" y="3310081"/>
+            <a:ext cx="4872892" cy="3267633"/>
+          </a:xfrm>
+          <a:prstGeom prst="rect">
+            <a:avLst/>
+          </a:prstGeom>
+        </p:spPr>
+      </p:pic>
     </p:spTree>
     <p:extLst>
       <p:ext uri="{BB962C8B-B14F-4D97-AF65-F5344CB8AC3E}">
-        <p14:creationId xmlns:p14="http://schemas.microsoft.com/office/powerpoint/2010/main" val="3068982192"/>
+        <p14:creationId xmlns:p14="http://schemas.microsoft.com/office/powerpoint/2010/main" val="1761172003"/>
       </p:ext>
     </p:extLst>
   </p:cSld>
@@ -20196,36 +20173,26 @@
           <a:lstStyle/>
           <a:p>
             <a:r>
-              <a:rPr lang="en-US" dirty="0"/>
-              <a:t>Slicing</a:t>
+              <a:rPr lang="en-US"/>
+              <a:t>Lists can contain other lists</a:t>
             </a:r>
           </a:p>
           <a:p>
             <a:pPr lvl="1"/>
             <a:r>
-              <a:rPr lang="en-US" dirty="0"/>
-              <a:t>Syntax uses square brackets, with the first value being the start index, and the second value being the end index (non-inclusive)</a:t>
-            </a:r>
-          </a:p>
-          <a:p>
-            <a:pPr lvl="1"/>
-            <a:r>
-              <a:rPr lang="en-US" dirty="0"/>
-              <a:t>The start and/or end can be excluded and the interpreter will start from the beginning or end at the last index</a:t>
-            </a:r>
-          </a:p>
-          <a:p>
-            <a:pPr lvl="1"/>
+              <a:rPr lang="en-US"/>
+              <a:t>Access internal lists using the same square bracket notation</a:t>
+            </a:r>
             <a:endParaRPr lang="en-US" dirty="0"/>
           </a:p>
         </p:txBody>
       </p:sp>
       <p:pic>
         <p:nvPicPr>
-          <p:cNvPr id="4" name="Picture 4" descr="A close up of text on a black background&#10;&#10;Description automatically generated">
+          <p:cNvPr id="5" name="Picture 5" descr="A screenshot of a cell phone&#10;&#10;Description automatically generated">
             <a:extLst>
               <a:ext uri="{FF2B5EF4-FFF2-40B4-BE49-F238E27FC236}">
-                <a16:creationId xmlns:a16="http://schemas.microsoft.com/office/drawing/2014/main" id="{0AAB46F1-32FF-49EB-85F0-DC9919487A99}"/>
+                <a16:creationId xmlns:a16="http://schemas.microsoft.com/office/drawing/2014/main" id="{B057C833-D30E-41C1-9931-A05FBB997D65}"/>
               </a:ext>
             </a:extLst>
           </p:cNvPr>
@@ -20242,8 +20209,8 @@
         </p:blipFill>
         <p:spPr>
           <a:xfrm>
-            <a:off x="5716858" y="3310081"/>
-            <a:ext cx="4872892" cy="3267633"/>
+            <a:off x="2922121" y="2503391"/>
+            <a:ext cx="6341533" cy="3086978"/>
           </a:xfrm>
           <a:prstGeom prst="rect">
             <a:avLst/>
@@ -20253,7 +20220,7 @@
     </p:spTree>
     <p:extLst>
       <p:ext uri="{BB962C8B-B14F-4D97-AF65-F5344CB8AC3E}">
-        <p14:creationId xmlns:p14="http://schemas.microsoft.com/office/powerpoint/2010/main" val="1761172003"/>
+        <p14:creationId xmlns:p14="http://schemas.microsoft.com/office/powerpoint/2010/main" val="187834809"/>
       </p:ext>
     </p:extLst>
   </p:cSld>
@@ -20344,25 +20311,34 @@
           <a:p>
             <a:r>
               <a:rPr lang="en-US"/>
-              <a:t>Lists can contain other lists</a:t>
-            </a:r>
+              <a:t>A “quirk” of Python, but strings have similar functionality to lists</a:t>
+            </a:r>
+            <a:endParaRPr lang="en-US" dirty="0"/>
           </a:p>
           <a:p>
             <a:pPr lvl="1"/>
             <a:r>
               <a:rPr lang="en-US"/>
-              <a:t>Access internal lists using the same square bracket notation</a:t>
-            </a:r>
+              <a:t>You can traverse a string in the same way using the square bracket notation</a:t>
+            </a:r>
+            <a:endParaRPr lang="en-US" dirty="0"/>
+          </a:p>
+          <a:p>
+            <a:pPr lvl="1"/>
+            <a:endParaRPr lang="en-US" dirty="0"/>
+          </a:p>
+          <a:p>
+            <a:pPr lvl="1"/>
             <a:endParaRPr lang="en-US" dirty="0"/>
           </a:p>
         </p:txBody>
       </p:sp>
       <p:pic>
         <p:nvPicPr>
-          <p:cNvPr id="5" name="Picture 5" descr="A screenshot of a cell phone&#10;&#10;Description automatically generated">
+          <p:cNvPr id="5" name="Picture 5" descr="A picture containing bottle&#10;&#10;Description automatically generated">
             <a:extLst>
               <a:ext uri="{FF2B5EF4-FFF2-40B4-BE49-F238E27FC236}">
-                <a16:creationId xmlns:a16="http://schemas.microsoft.com/office/drawing/2014/main" id="{B057C833-D30E-41C1-9931-A05FBB997D65}"/>
+                <a16:creationId xmlns:a16="http://schemas.microsoft.com/office/drawing/2014/main" id="{04D6FB7C-0757-4A34-84F2-D794EA9EA312}"/>
               </a:ext>
             </a:extLst>
           </p:cNvPr>
@@ -20379,8 +20355,8 @@
         </p:blipFill>
         <p:spPr>
           <a:xfrm>
-            <a:off x="2922121" y="2503391"/>
-            <a:ext cx="6341533" cy="3086978"/>
+            <a:off x="3659554" y="2579427"/>
+            <a:ext cx="4872892" cy="3008222"/>
           </a:xfrm>
           <a:prstGeom prst="rect">
             <a:avLst/>
@@ -20390,7 +20366,7 @@
     </p:spTree>
     <p:extLst>
       <p:ext uri="{BB962C8B-B14F-4D97-AF65-F5344CB8AC3E}">
-        <p14:creationId xmlns:p14="http://schemas.microsoft.com/office/powerpoint/2010/main" val="187834809"/>
+        <p14:creationId xmlns:p14="http://schemas.microsoft.com/office/powerpoint/2010/main" val="285019892"/>
       </p:ext>
     </p:extLst>
   </p:cSld>
@@ -20445,7 +20421,7 @@
           <a:p>
             <a:r>
               <a:rPr lang="en-US"/>
-              <a:t>Lists</a:t>
+              <a:t>Tuples</a:t>
             </a:r>
             <a:endParaRPr lang="en-US" dirty="0"/>
           </a:p>
@@ -20479,36 +20455,51 @@
           </a:bodyPr>
           <a:lstStyle/>
           <a:p>
+            <a:pPr lvl="1"/>
             <a:r>
               <a:rPr lang="en-US"/>
-              <a:t>A “quirk” of Python, but strings have similar functionality to lists</a:t>
-            </a:r>
-            <a:endParaRPr lang="en-US" dirty="0"/>
+              <a:t>Tuples are similar to lists, but they are 'immutable' (cannot change)</a:t>
+            </a:r>
           </a:p>
           <a:p>
             <a:pPr lvl="1"/>
             <a:r>
               <a:rPr lang="en-US"/>
-              <a:t>You can traverse a string in the same way using the square bracket notation</a:t>
-            </a:r>
-            <a:endParaRPr lang="en-US" dirty="0"/>
+              <a:t>Declared using parenthesis ( )</a:t>
+            </a:r>
           </a:p>
           <a:p>
             <a:pPr lvl="1"/>
-            <a:endParaRPr lang="en-US" dirty="0"/>
-          </a:p>
-          <a:p>
-            <a:pPr lvl="1"/>
-            <a:endParaRPr lang="en-US" dirty="0"/>
+            <a:r>
+              <a:rPr lang="en-US"/>
+              <a:t>Tuples with a single element need to have a trailing comma</a:t>
+            </a:r>
+          </a:p>
+          <a:p>
+            <a:pPr lvl="2"/>
+            <a:r>
+              <a:rPr lang="en-US"/>
+              <a:t>Ex: </a:t>
+            </a:r>
+            <a:r>
+              <a:rPr lang="en-US">
+                <a:highlight>
+                  <a:srgbClr val="000000"/>
+                </a:highlight>
+                <a:latin typeface="Courier New" panose="02070309020205020404" pitchFamily="49" charset="0"/>
+                <a:cs typeface="Courier New" panose="02070309020205020404" pitchFamily="49" charset="0"/>
+              </a:rPr>
+              <a:t>t = (100,)</a:t>
+            </a:r>
           </a:p>
         </p:txBody>
       </p:sp>
       <p:pic>
         <p:nvPicPr>
-          <p:cNvPr id="5" name="Picture 5" descr="A picture containing bottle&#10;&#10;Description automatically generated">
+          <p:cNvPr id="5" name="Picture 5" descr="A picture containing food&#10;&#10;Description automatically generated">
             <a:extLst>
               <a:ext uri="{FF2B5EF4-FFF2-40B4-BE49-F238E27FC236}">
-                <a16:creationId xmlns:a16="http://schemas.microsoft.com/office/drawing/2014/main" id="{04D6FB7C-0757-4A34-84F2-D794EA9EA312}"/>
+                <a16:creationId xmlns:a16="http://schemas.microsoft.com/office/drawing/2014/main" id="{FC63283E-B2D1-4EEF-82D2-BCA9050081E7}"/>
               </a:ext>
             </a:extLst>
           </p:cNvPr>
@@ -20525,8 +20516,8 @@
         </p:blipFill>
         <p:spPr>
           <a:xfrm>
-            <a:off x="3659554" y="2579427"/>
-            <a:ext cx="4872892" cy="3008222"/>
+            <a:off x="2300191" y="3428999"/>
+            <a:ext cx="7591617" cy="2537615"/>
           </a:xfrm>
           <a:prstGeom prst="rect">
             <a:avLst/>
@@ -20536,7 +20527,7 @@
     </p:spTree>
     <p:extLst>
       <p:ext uri="{BB962C8B-B14F-4D97-AF65-F5344CB8AC3E}">
-        <p14:creationId xmlns:p14="http://schemas.microsoft.com/office/powerpoint/2010/main" val="285019892"/>
+        <p14:creationId xmlns:p14="http://schemas.microsoft.com/office/powerpoint/2010/main" val="1978656173"/>
       </p:ext>
     </p:extLst>
   </p:cSld>
@@ -20591,167 +20582,6 @@
           <a:p>
             <a:r>
               <a:rPr lang="en-US"/>
-              <a:t>Tuples</a:t>
-            </a:r>
-            <a:endParaRPr lang="en-US" dirty="0"/>
-          </a:p>
-        </p:txBody>
-      </p:sp>
-      <p:sp>
-        <p:nvSpPr>
-          <p:cNvPr id="3" name="Content Placeholder 2">
-            <a:extLst>
-              <a:ext uri="{FF2B5EF4-FFF2-40B4-BE49-F238E27FC236}">
-                <a16:creationId xmlns:a16="http://schemas.microsoft.com/office/drawing/2014/main" id="{3713A5A2-1019-0143-BC00-1B8B12D7C198}"/>
-              </a:ext>
-            </a:extLst>
-          </p:cNvPr>
-          <p:cNvSpPr>
-            <a:spLocks noGrp="1"/>
-          </p:cNvSpPr>
-          <p:nvPr>
-            <p:ph idx="1"/>
-          </p:nvPr>
-        </p:nvSpPr>
-        <p:spPr>
-          <a:xfrm>
-            <a:off x="1143499" y="1488613"/>
-            <a:ext cx="8596668" cy="3880773"/>
-          </a:xfrm>
-        </p:spPr>
-        <p:txBody>
-          <a:bodyPr vert="horz" lIns="91440" tIns="45720" rIns="91440" bIns="45720" rtlCol="0" anchor="t">
-            <a:normAutofit/>
-          </a:bodyPr>
-          <a:lstStyle/>
-          <a:p>
-            <a:pPr lvl="1"/>
-            <a:r>
-              <a:rPr lang="en-US"/>
-              <a:t>Tuples are similar to lists, but they are 'immutable' (cannot change)</a:t>
-            </a:r>
-          </a:p>
-          <a:p>
-            <a:pPr lvl="1"/>
-            <a:r>
-              <a:rPr lang="en-US"/>
-              <a:t>Declared using parenthesis ( )</a:t>
-            </a:r>
-          </a:p>
-          <a:p>
-            <a:pPr lvl="1"/>
-            <a:r>
-              <a:rPr lang="en-US"/>
-              <a:t>Tuples with a single element need to have a trailing comma</a:t>
-            </a:r>
-          </a:p>
-          <a:p>
-            <a:pPr lvl="2"/>
-            <a:r>
-              <a:rPr lang="en-US"/>
-              <a:t>Ex: </a:t>
-            </a:r>
-            <a:r>
-              <a:rPr lang="en-US">
-                <a:highlight>
-                  <a:srgbClr val="000000"/>
-                </a:highlight>
-                <a:latin typeface="Courier New" panose="02070309020205020404" pitchFamily="49" charset="0"/>
-                <a:cs typeface="Courier New" panose="02070309020205020404" pitchFamily="49" charset="0"/>
-              </a:rPr>
-              <a:t>t = (100,)</a:t>
-            </a:r>
-          </a:p>
-        </p:txBody>
-      </p:sp>
-      <p:pic>
-        <p:nvPicPr>
-          <p:cNvPr id="5" name="Picture 5" descr="A picture containing food&#10;&#10;Description automatically generated">
-            <a:extLst>
-              <a:ext uri="{FF2B5EF4-FFF2-40B4-BE49-F238E27FC236}">
-                <a16:creationId xmlns:a16="http://schemas.microsoft.com/office/drawing/2014/main" id="{FC63283E-B2D1-4EEF-82D2-BCA9050081E7}"/>
-              </a:ext>
-            </a:extLst>
-          </p:cNvPr>
-          <p:cNvPicPr>
-            <a:picLocks noChangeAspect="1"/>
-          </p:cNvPicPr>
-          <p:nvPr/>
-        </p:nvPicPr>
-        <p:blipFill>
-          <a:blip r:embed="rId2"/>
-          <a:stretch>
-            <a:fillRect/>
-          </a:stretch>
-        </p:blipFill>
-        <p:spPr>
-          <a:xfrm>
-            <a:off x="2300191" y="3428999"/>
-            <a:ext cx="7591617" cy="2537615"/>
-          </a:xfrm>
-          <a:prstGeom prst="rect">
-            <a:avLst/>
-          </a:prstGeom>
-        </p:spPr>
-      </p:pic>
-    </p:spTree>
-    <p:extLst>
-      <p:ext uri="{BB962C8B-B14F-4D97-AF65-F5344CB8AC3E}">
-        <p14:creationId xmlns:p14="http://schemas.microsoft.com/office/powerpoint/2010/main" val="1978656173"/>
-      </p:ext>
-    </p:extLst>
-  </p:cSld>
-  <p:clrMapOvr>
-    <a:masterClrMapping/>
-  </p:clrMapOvr>
-</p:sld>
-</file>
-
-<file path=ppt/slides/slide19.xml><?xml version="1.0" encoding="utf-8"?>
-<p:sld xmlns:a="http://schemas.openxmlformats.org/drawingml/2006/main" xmlns:r="http://schemas.openxmlformats.org/officeDocument/2006/relationships" xmlns:p="http://schemas.openxmlformats.org/presentationml/2006/main">
-  <p:cSld>
-    <p:spTree>
-      <p:nvGrpSpPr>
-        <p:cNvPr id="1" name=""/>
-        <p:cNvGrpSpPr/>
-        <p:nvPr/>
-      </p:nvGrpSpPr>
-      <p:grpSpPr>
-        <a:xfrm>
-          <a:off x="0" y="0"/>
-          <a:ext cx="0" cy="0"/>
-          <a:chOff x="0" y="0"/>
-          <a:chExt cx="0" cy="0"/>
-        </a:xfrm>
-      </p:grpSpPr>
-      <p:sp>
-        <p:nvSpPr>
-          <p:cNvPr id="2" name="Title 1">
-            <a:extLst>
-              <a:ext uri="{FF2B5EF4-FFF2-40B4-BE49-F238E27FC236}">
-                <a16:creationId xmlns:a16="http://schemas.microsoft.com/office/drawing/2014/main" id="{089AB04D-874D-0245-A562-02212EE48CA7}"/>
-              </a:ext>
-            </a:extLst>
-          </p:cNvPr>
-          <p:cNvSpPr>
-            <a:spLocks noGrp="1"/>
-          </p:cNvSpPr>
-          <p:nvPr>
-            <p:ph type="title"/>
-          </p:nvPr>
-        </p:nvSpPr>
-        <p:spPr>
-          <a:xfrm>
-            <a:off x="1143499" y="163050"/>
-            <a:ext cx="10515600" cy="1325563"/>
-          </a:xfrm>
-        </p:spPr>
-        <p:txBody>
-          <a:bodyPr/>
-          <a:lstStyle/>
-          <a:p>
-            <a:r>
-              <a:rPr lang="en-US"/>
               <a:t>Sets</a:t>
             </a:r>
             <a:endParaRPr lang="en-US" dirty="0"/>
@@ -20859,14 +20689,46 @@
             <a:pPr lvl="1"/>
             <a:r>
               <a:rPr lang="en-US" dirty="0"/>
-              <a:t>Add elements using add() or update() -&gt; update is for multiple elements</a:t>
+              <a:t>Add elements </a:t>
+            </a:r>
+            <a:r>
+              <a:rPr lang="en-US"/>
+              <a:t>using .add</a:t>
+            </a:r>
+            <a:r>
+              <a:rPr lang="en-US" dirty="0"/>
+              <a:t>() </a:t>
+            </a:r>
+            <a:r>
+              <a:rPr lang="en-US"/>
+              <a:t>or .update</a:t>
+            </a:r>
+            <a:r>
+              <a:rPr lang="en-US" dirty="0"/>
+              <a:t>() -&gt; update is for multiple elements</a:t>
             </a:r>
           </a:p>
           <a:p>
             <a:pPr lvl="1"/>
             <a:r>
               <a:rPr lang="en-US" dirty="0"/>
-              <a:t>Remove elements using remove() or discard()</a:t>
+              <a:t>Remove elements </a:t>
+            </a:r>
+            <a:r>
+              <a:rPr lang="en-US"/>
+              <a:t>using .remove</a:t>
+            </a:r>
+            <a:r>
+              <a:rPr lang="en-US" dirty="0"/>
+              <a:t>() </a:t>
+            </a:r>
+            <a:r>
+              <a:rPr lang="en-US"/>
+              <a:t>or .discard</a:t>
+            </a:r>
+            <a:r>
+              <a:rPr lang="en-US" dirty="0"/>
+              <a:t>()</a:t>
             </a:r>
           </a:p>
           <a:p>
@@ -20955,6 +20817,189 @@
 </p:sld>
 </file>
 
+<file path=ppt/slides/slide19.xml><?xml version="1.0" encoding="utf-8"?>
+<p:sld xmlns:a="http://schemas.openxmlformats.org/drawingml/2006/main" xmlns:r="http://schemas.openxmlformats.org/officeDocument/2006/relationships" xmlns:p="http://schemas.openxmlformats.org/presentationml/2006/main">
+  <p:cSld>
+    <p:spTree>
+      <p:nvGrpSpPr>
+        <p:cNvPr id="1" name=""/>
+        <p:cNvGrpSpPr/>
+        <p:nvPr/>
+      </p:nvGrpSpPr>
+      <p:grpSpPr>
+        <a:xfrm>
+          <a:off x="0" y="0"/>
+          <a:ext cx="0" cy="0"/>
+          <a:chOff x="0" y="0"/>
+          <a:chExt cx="0" cy="0"/>
+        </a:xfrm>
+      </p:grpSpPr>
+      <p:sp>
+        <p:nvSpPr>
+          <p:cNvPr id="2" name="Title 1">
+            <a:extLst>
+              <a:ext uri="{FF2B5EF4-FFF2-40B4-BE49-F238E27FC236}">
+                <a16:creationId xmlns:a16="http://schemas.microsoft.com/office/drawing/2014/main" id="{BE79D0F1-31A8-934B-8486-B9D3C52E0A02}"/>
+              </a:ext>
+            </a:extLst>
+          </p:cNvPr>
+          <p:cNvSpPr>
+            <a:spLocks noGrp="1"/>
+          </p:cNvSpPr>
+          <p:nvPr>
+            <p:ph type="title"/>
+          </p:nvPr>
+        </p:nvSpPr>
+        <p:spPr>
+          <a:xfrm>
+            <a:off x="2231136" y="292339"/>
+            <a:ext cx="7729728" cy="1188720"/>
+          </a:xfrm>
+        </p:spPr>
+        <p:txBody>
+          <a:bodyPr/>
+          <a:lstStyle/>
+          <a:p>
+            <a:r>
+              <a:rPr lang="en-US"/>
+              <a:t>Dictionaries</a:t>
+            </a:r>
+          </a:p>
+        </p:txBody>
+      </p:sp>
+      <p:sp>
+        <p:nvSpPr>
+          <p:cNvPr id="4" name="Content Placeholder 2">
+            <a:extLst>
+              <a:ext uri="{FF2B5EF4-FFF2-40B4-BE49-F238E27FC236}">
+                <a16:creationId xmlns:a16="http://schemas.microsoft.com/office/drawing/2014/main" id="{5C0E649D-E3FD-41FB-BA87-37C62725C740}"/>
+              </a:ext>
+            </a:extLst>
+          </p:cNvPr>
+          <p:cNvSpPr>
+            <a:spLocks noGrp="1"/>
+          </p:cNvSpPr>
+          <p:nvPr>
+            <p:ph idx="1"/>
+          </p:nvPr>
+        </p:nvSpPr>
+        <p:spPr>
+          <a:xfrm>
+            <a:off x="1143000" y="1478755"/>
+            <a:ext cx="10515600" cy="5011118"/>
+          </a:xfrm>
+        </p:spPr>
+        <p:txBody>
+          <a:bodyPr vert="horz" lIns="91440" tIns="45720" rIns="91440" bIns="45720" rtlCol="0" anchor="t">
+            <a:normAutofit fontScale="85000" lnSpcReduction="10000"/>
+          </a:bodyPr>
+          <a:lstStyle/>
+          <a:p>
+            <a:r>
+              <a:rPr lang="en-US"/>
+              <a:t>A dictionary in Python is a collection of key-value pairs</a:t>
+            </a:r>
+            <a:endParaRPr lang="en-US" dirty="0"/>
+          </a:p>
+          <a:p>
+            <a:r>
+              <a:rPr lang="en-US"/>
+              <a:t>Each key is connected to a value, and you use this key to access the value associated with it</a:t>
+            </a:r>
+            <a:endParaRPr lang="en-US" dirty="0"/>
+          </a:p>
+          <a:p>
+            <a:r>
+              <a:rPr lang="en-US"/>
+              <a:t>Dictionaries are wrapped in curly braces/brackets: { }</a:t>
+            </a:r>
+            <a:endParaRPr lang="en-US" dirty="0"/>
+          </a:p>
+          <a:p>
+            <a:endParaRPr lang="en-US" dirty="0"/>
+          </a:p>
+          <a:p>
+            <a:endParaRPr lang="en-US" dirty="0"/>
+          </a:p>
+          <a:p>
+            <a:endParaRPr lang="en-US" dirty="0"/>
+          </a:p>
+          <a:p>
+            <a:endParaRPr lang="en-US" dirty="0"/>
+          </a:p>
+          <a:p>
+            <a:endParaRPr lang="en-US" dirty="0"/>
+          </a:p>
+          <a:p>
+            <a:r>
+              <a:rPr lang="en-US"/>
+              <a:t>Notice that key/value pairs are separated by comma, and that the pair itself uses a colon to separate the key from the value</a:t>
+            </a:r>
+            <a:endParaRPr lang="en-US" dirty="0"/>
+          </a:p>
+          <a:p>
+            <a:r>
+              <a:rPr lang="en-US"/>
+              <a:t>Dictionaries can be initialized with no data (so just empty curly brackets)</a:t>
+            </a:r>
+            <a:endParaRPr lang="en-US" dirty="0"/>
+          </a:p>
+          <a:p>
+            <a:endParaRPr lang="en-US" dirty="0"/>
+          </a:p>
+          <a:p>
+            <a:pPr lvl="1"/>
+            <a:endParaRPr lang="en-US" dirty="0"/>
+          </a:p>
+          <a:p>
+            <a:pPr lvl="1"/>
+            <a:endParaRPr lang="en-US" dirty="0"/>
+          </a:p>
+        </p:txBody>
+      </p:sp>
+      <p:pic>
+        <p:nvPicPr>
+          <p:cNvPr id="3" name="Picture 4" descr="A close up of a sign&#10;&#10;Description automatically generated">
+            <a:extLst>
+              <a:ext uri="{FF2B5EF4-FFF2-40B4-BE49-F238E27FC236}">
+                <a16:creationId xmlns:a16="http://schemas.microsoft.com/office/drawing/2014/main" id="{9B50198E-59C2-4405-ACE6-E7B05ABCC7F2}"/>
+              </a:ext>
+            </a:extLst>
+          </p:cNvPr>
+          <p:cNvPicPr>
+            <a:picLocks noChangeAspect="1"/>
+          </p:cNvPicPr>
+          <p:nvPr/>
+        </p:nvPicPr>
+        <p:blipFill>
+          <a:blip r:embed="rId2"/>
+          <a:stretch>
+            <a:fillRect/>
+          </a:stretch>
+        </p:blipFill>
+        <p:spPr>
+          <a:xfrm>
+            <a:off x="2476982" y="3307124"/>
+            <a:ext cx="7402010" cy="1231550"/>
+          </a:xfrm>
+          <a:prstGeom prst="rect">
+            <a:avLst/>
+          </a:prstGeom>
+        </p:spPr>
+      </p:pic>
+    </p:spTree>
+    <p:extLst>
+      <p:ext uri="{BB962C8B-B14F-4D97-AF65-F5344CB8AC3E}">
+        <p14:creationId xmlns:p14="http://schemas.microsoft.com/office/powerpoint/2010/main" val="3016926997"/>
+      </p:ext>
+    </p:extLst>
+  </p:cSld>
+  <p:clrMapOvr>
+    <a:masterClrMapping/>
+  </p:clrMapOvr>
+</p:sld>
+</file>
+
 <file path=ppt/slides/slide2.xml><?xml version="1.0" encoding="utf-8"?>
 <p:sld xmlns:a="http://schemas.openxmlformats.org/drawingml/2006/main" xmlns:r="http://schemas.openxmlformats.org/officeDocument/2006/relationships" xmlns:p="http://schemas.openxmlformats.org/presentationml/2006/main">
   <p:cSld>
@@ -21138,189 +21183,6 @@
         </p:spPr>
         <p:txBody>
           <a:bodyPr vert="horz" lIns="91440" tIns="45720" rIns="91440" bIns="45720" rtlCol="0" anchor="t">
-            <a:normAutofit fontScale="85000" lnSpcReduction="10000"/>
-          </a:bodyPr>
-          <a:lstStyle/>
-          <a:p>
-            <a:r>
-              <a:rPr lang="en-US"/>
-              <a:t>A dictionary in Python is a collection of key-value pairs</a:t>
-            </a:r>
-            <a:endParaRPr lang="en-US" dirty="0"/>
-          </a:p>
-          <a:p>
-            <a:r>
-              <a:rPr lang="en-US"/>
-              <a:t>Each key is connected to a value, and you use this key to access the value associated with it</a:t>
-            </a:r>
-            <a:endParaRPr lang="en-US" dirty="0"/>
-          </a:p>
-          <a:p>
-            <a:r>
-              <a:rPr lang="en-US"/>
-              <a:t>Dictionaries are wrapped in curly braces/brackets: { }</a:t>
-            </a:r>
-            <a:endParaRPr lang="en-US" dirty="0"/>
-          </a:p>
-          <a:p>
-            <a:endParaRPr lang="en-US" dirty="0"/>
-          </a:p>
-          <a:p>
-            <a:endParaRPr lang="en-US" dirty="0"/>
-          </a:p>
-          <a:p>
-            <a:endParaRPr lang="en-US" dirty="0"/>
-          </a:p>
-          <a:p>
-            <a:endParaRPr lang="en-US" dirty="0"/>
-          </a:p>
-          <a:p>
-            <a:endParaRPr lang="en-US" dirty="0"/>
-          </a:p>
-          <a:p>
-            <a:r>
-              <a:rPr lang="en-US"/>
-              <a:t>Notice that key/value pairs are separated by comma, and that the pair itself uses a colon to separate the key from the value</a:t>
-            </a:r>
-            <a:endParaRPr lang="en-US" dirty="0"/>
-          </a:p>
-          <a:p>
-            <a:r>
-              <a:rPr lang="en-US"/>
-              <a:t>Dictionaries can be initialized with no data (so just empty curly brackets)</a:t>
-            </a:r>
-            <a:endParaRPr lang="en-US" dirty="0"/>
-          </a:p>
-          <a:p>
-            <a:endParaRPr lang="en-US" dirty="0"/>
-          </a:p>
-          <a:p>
-            <a:pPr lvl="1"/>
-            <a:endParaRPr lang="en-US" dirty="0"/>
-          </a:p>
-          <a:p>
-            <a:pPr lvl="1"/>
-            <a:endParaRPr lang="en-US" dirty="0"/>
-          </a:p>
-        </p:txBody>
-      </p:sp>
-      <p:pic>
-        <p:nvPicPr>
-          <p:cNvPr id="3" name="Picture 4" descr="A close up of a sign&#10;&#10;Description automatically generated">
-            <a:extLst>
-              <a:ext uri="{FF2B5EF4-FFF2-40B4-BE49-F238E27FC236}">
-                <a16:creationId xmlns:a16="http://schemas.microsoft.com/office/drawing/2014/main" id="{9B50198E-59C2-4405-ACE6-E7B05ABCC7F2}"/>
-              </a:ext>
-            </a:extLst>
-          </p:cNvPr>
-          <p:cNvPicPr>
-            <a:picLocks noChangeAspect="1"/>
-          </p:cNvPicPr>
-          <p:nvPr/>
-        </p:nvPicPr>
-        <p:blipFill>
-          <a:blip r:embed="rId2"/>
-          <a:stretch>
-            <a:fillRect/>
-          </a:stretch>
-        </p:blipFill>
-        <p:spPr>
-          <a:xfrm>
-            <a:off x="2476982" y="3307124"/>
-            <a:ext cx="7402010" cy="1231550"/>
-          </a:xfrm>
-          <a:prstGeom prst="rect">
-            <a:avLst/>
-          </a:prstGeom>
-        </p:spPr>
-      </p:pic>
-    </p:spTree>
-    <p:extLst>
-      <p:ext uri="{BB962C8B-B14F-4D97-AF65-F5344CB8AC3E}">
-        <p14:creationId xmlns:p14="http://schemas.microsoft.com/office/powerpoint/2010/main" val="3016926997"/>
-      </p:ext>
-    </p:extLst>
-  </p:cSld>
-  <p:clrMapOvr>
-    <a:masterClrMapping/>
-  </p:clrMapOvr>
-</p:sld>
-</file>
-
-<file path=ppt/slides/slide21.xml><?xml version="1.0" encoding="utf-8"?>
-<p:sld xmlns:a="http://schemas.openxmlformats.org/drawingml/2006/main" xmlns:r="http://schemas.openxmlformats.org/officeDocument/2006/relationships" xmlns:p="http://schemas.openxmlformats.org/presentationml/2006/main">
-  <p:cSld>
-    <p:spTree>
-      <p:nvGrpSpPr>
-        <p:cNvPr id="1" name=""/>
-        <p:cNvGrpSpPr/>
-        <p:nvPr/>
-      </p:nvGrpSpPr>
-      <p:grpSpPr>
-        <a:xfrm>
-          <a:off x="0" y="0"/>
-          <a:ext cx="0" cy="0"/>
-          <a:chOff x="0" y="0"/>
-          <a:chExt cx="0" cy="0"/>
-        </a:xfrm>
-      </p:grpSpPr>
-      <p:sp>
-        <p:nvSpPr>
-          <p:cNvPr id="2" name="Title 1">
-            <a:extLst>
-              <a:ext uri="{FF2B5EF4-FFF2-40B4-BE49-F238E27FC236}">
-                <a16:creationId xmlns:a16="http://schemas.microsoft.com/office/drawing/2014/main" id="{BE79D0F1-31A8-934B-8486-B9D3C52E0A02}"/>
-              </a:ext>
-            </a:extLst>
-          </p:cNvPr>
-          <p:cNvSpPr>
-            <a:spLocks noGrp="1"/>
-          </p:cNvSpPr>
-          <p:nvPr>
-            <p:ph type="title"/>
-          </p:nvPr>
-        </p:nvSpPr>
-        <p:spPr>
-          <a:xfrm>
-            <a:off x="2231136" y="292339"/>
-            <a:ext cx="7729728" cy="1188720"/>
-          </a:xfrm>
-        </p:spPr>
-        <p:txBody>
-          <a:bodyPr/>
-          <a:lstStyle/>
-          <a:p>
-            <a:r>
-              <a:rPr lang="en-US"/>
-              <a:t>Dictionaries</a:t>
-            </a:r>
-          </a:p>
-        </p:txBody>
-      </p:sp>
-      <p:sp>
-        <p:nvSpPr>
-          <p:cNvPr id="4" name="Content Placeholder 2">
-            <a:extLst>
-              <a:ext uri="{FF2B5EF4-FFF2-40B4-BE49-F238E27FC236}">
-                <a16:creationId xmlns:a16="http://schemas.microsoft.com/office/drawing/2014/main" id="{5C0E649D-E3FD-41FB-BA87-37C62725C740}"/>
-              </a:ext>
-            </a:extLst>
-          </p:cNvPr>
-          <p:cNvSpPr>
-            <a:spLocks noGrp="1"/>
-          </p:cNvSpPr>
-          <p:nvPr>
-            <p:ph idx="1"/>
-          </p:nvPr>
-        </p:nvSpPr>
-        <p:spPr>
-          <a:xfrm>
-            <a:off x="1143000" y="1478755"/>
-            <a:ext cx="10515600" cy="5011118"/>
-          </a:xfrm>
-        </p:spPr>
-        <p:txBody>
-          <a:bodyPr vert="horz" lIns="91440" tIns="45720" rIns="91440" bIns="45720" rtlCol="0" anchor="t">
             <a:normAutofit fontScale="92500" lnSpcReduction="20000"/>
           </a:bodyPr>
           <a:lstStyle/>
@@ -21363,7 +21225,7 @@
             <a:pPr lvl="1"/>
             <a:r>
               <a:rPr lang="en-US"/>
-              <a:t>get(key, default) - gets the value if present, otherwise return default (if provided)</a:t>
+              <a:t>.get(key, default) - gets the value if present, otherwise return default (if provided)</a:t>
             </a:r>
             <a:endParaRPr lang="en-US" dirty="0"/>
           </a:p>
@@ -21476,7 +21338,7 @@
 </p:sld>
 </file>
 
-<file path=ppt/slides/slide22.xml><?xml version="1.0" encoding="utf-8"?>
+<file path=ppt/slides/slide21.xml><?xml version="1.0" encoding="utf-8"?>
 <p:sld xmlns:a="http://schemas.openxmlformats.org/drawingml/2006/main" xmlns:r="http://schemas.openxmlformats.org/officeDocument/2006/relationships" xmlns:p="http://schemas.openxmlformats.org/presentationml/2006/main">
   <p:cSld>
     <p:spTree>
@@ -21591,8 +21453,12 @@
           <a:p>
             <a:pPr lvl="1"/>
             <a:r>
+              <a:rPr lang="en-US" sz="1400"/>
+              <a:t>.pop(key) </a:t>
+            </a:r>
+            <a:r>
               <a:rPr lang="en-US" sz="1400" dirty="0"/>
-              <a:t>pop() - removes key/value pair from dictionary and </a:t>
+              <a:t>- removes key/value pair from dictionary and </a:t>
             </a:r>
             <a:r>
               <a:rPr lang="en-US" sz="1400"/>
@@ -21603,8 +21469,8 @@
           <a:p>
             <a:pPr lvl="1"/>
             <a:r>
-              <a:rPr lang="en-US" sz="1400" dirty="0" err="1"/>
-              <a:t>popitem</a:t>
+              <a:rPr lang="en-US" sz="1400"/>
+              <a:t>.popitem</a:t>
             </a:r>
             <a:r>
               <a:rPr lang="en-US" sz="1400" dirty="0"/>
@@ -21633,8 +21499,12 @@
           <a:p>
             <a:pPr lvl="1"/>
             <a:r>
+              <a:rPr lang="en-US" sz="1400"/>
+              <a:t>.clear</a:t>
+            </a:r>
+            <a:r>
               <a:rPr lang="en-US" sz="1400" dirty="0"/>
-              <a:t>clear() - empties dictionary</a:t>
+              <a:t>() - empties dictionary</a:t>
             </a:r>
           </a:p>
           <a:p>
@@ -21720,7 +21590,7 @@
 </p:sld>
 </file>
 
-<file path=ppt/slides/slide23.xml><?xml version="1.0" encoding="utf-8"?>
+<file path=ppt/slides/slide22.xml><?xml version="1.0" encoding="utf-8"?>
 <p:sld xmlns:a="http://schemas.openxmlformats.org/drawingml/2006/main" xmlns:r="http://schemas.openxmlformats.org/officeDocument/2006/relationships" xmlns:p="http://schemas.openxmlformats.org/presentationml/2006/main">
   <p:cSld>
     <p:spTree>
@@ -21876,7 +21746,7 @@
 </p:sld>
 </file>
 
-<file path=ppt/slides/slide24.xml><?xml version="1.0" encoding="utf-8"?>
+<file path=ppt/slides/slide23.xml><?xml version="1.0" encoding="utf-8"?>
 <p:sld xmlns:a="http://schemas.openxmlformats.org/drawingml/2006/main" xmlns:r="http://schemas.openxmlformats.org/officeDocument/2006/relationships" xmlns:p="http://schemas.openxmlformats.org/presentationml/2006/main">
   <p:cSld>
     <p:spTree>
@@ -21998,7 +21868,7 @@
 </p:sld>
 </file>
 
-<file path=ppt/slides/slide25.xml><?xml version="1.0" encoding="utf-8"?>
+<file path=ppt/slides/slide24.xml><?xml version="1.0" encoding="utf-8"?>
 <p:sld xmlns:a="http://schemas.openxmlformats.org/drawingml/2006/main" xmlns:r="http://schemas.openxmlformats.org/officeDocument/2006/relationships" xmlns:p="http://schemas.openxmlformats.org/presentationml/2006/main">
   <p:cSld>
     <p:spTree>
@@ -23418,171 +23288,6 @@
           <p:cNvPr id="2" name="Title 1">
             <a:extLst>
               <a:ext uri="{FF2B5EF4-FFF2-40B4-BE49-F238E27FC236}">
-                <a16:creationId xmlns:a16="http://schemas.microsoft.com/office/drawing/2014/main" id="{5C86CBF7-69F7-7B44-ABCE-F80D6130EA7B}"/>
-              </a:ext>
-            </a:extLst>
-          </p:cNvPr>
-          <p:cNvSpPr>
-            <a:spLocks noGrp="1"/>
-          </p:cNvSpPr>
-          <p:nvPr>
-            <p:ph type="title"/>
-          </p:nvPr>
-        </p:nvSpPr>
-        <p:spPr>
-          <a:xfrm>
-            <a:off x="1143000" y="153192"/>
-            <a:ext cx="10515600" cy="1325563"/>
-          </a:xfrm>
-        </p:spPr>
-        <p:txBody>
-          <a:bodyPr/>
-          <a:lstStyle/>
-          <a:p>
-            <a:r>
-              <a:rPr lang="en-US" dirty="0"/>
-              <a:t>Last Week</a:t>
-            </a:r>
-          </a:p>
-        </p:txBody>
-      </p:sp>
-      <p:sp>
-        <p:nvSpPr>
-          <p:cNvPr id="3" name="Content Placeholder 2">
-            <a:extLst>
-              <a:ext uri="{FF2B5EF4-FFF2-40B4-BE49-F238E27FC236}">
-                <a16:creationId xmlns:a16="http://schemas.microsoft.com/office/drawing/2014/main" id="{1095E837-F77E-AE4D-944C-919B5D780AAA}"/>
-              </a:ext>
-            </a:extLst>
-          </p:cNvPr>
-          <p:cNvSpPr>
-            <a:spLocks noGrp="1"/>
-          </p:cNvSpPr>
-          <p:nvPr>
-            <p:ph idx="1"/>
-          </p:nvPr>
-        </p:nvSpPr>
-        <p:spPr>
-          <a:xfrm>
-            <a:off x="1143000" y="1478755"/>
-            <a:ext cx="10515600" cy="4351338"/>
-          </a:xfrm>
-        </p:spPr>
-        <p:txBody>
-          <a:bodyPr vert="horz" lIns="91440" tIns="45720" rIns="91440" bIns="45720" rtlCol="0" anchor="t">
-            <a:normAutofit/>
-          </a:bodyPr>
-          <a:lstStyle/>
-          <a:p>
-            <a:r>
-              <a:rPr lang="en-US" dirty="0"/>
-              <a:t>Some additional things that may help...</a:t>
-            </a:r>
-          </a:p>
-          <a:p>
-            <a:pPr lvl="1"/>
-            <a:r>
-              <a:rPr lang="en-US" dirty="0"/>
-              <a:t>help() - gives you the details of the specific function</a:t>
-            </a:r>
-          </a:p>
-        </p:txBody>
-      </p:sp>
-      <p:pic>
-        <p:nvPicPr>
-          <p:cNvPr id="5" name="Picture 5" descr="A close up of a logo&#10;&#10;Description automatically generated">
-            <a:extLst>
-              <a:ext uri="{FF2B5EF4-FFF2-40B4-BE49-F238E27FC236}">
-                <a16:creationId xmlns:a16="http://schemas.microsoft.com/office/drawing/2014/main" id="{B1CA5894-019A-4758-883C-ED5815D0A5E9}"/>
-              </a:ext>
-            </a:extLst>
-          </p:cNvPr>
-          <p:cNvPicPr>
-            <a:picLocks noChangeAspect="1"/>
-          </p:cNvPicPr>
-          <p:nvPr/>
-        </p:nvPicPr>
-        <p:blipFill>
-          <a:blip r:embed="rId2"/>
-          <a:stretch>
-            <a:fillRect/>
-          </a:stretch>
-        </p:blipFill>
-        <p:spPr>
-          <a:xfrm>
-            <a:off x="1139092" y="3102360"/>
-            <a:ext cx="10294814" cy="2138202"/>
-          </a:xfrm>
-          <a:prstGeom prst="rect">
-            <a:avLst/>
-          </a:prstGeom>
-        </p:spPr>
-      </p:pic>
-      <p:pic>
-        <p:nvPicPr>
-          <p:cNvPr id="6" name="Picture 6">
-            <a:extLst>
-              <a:ext uri="{FF2B5EF4-FFF2-40B4-BE49-F238E27FC236}">
-                <a16:creationId xmlns:a16="http://schemas.microsoft.com/office/drawing/2014/main" id="{0B3613EF-C45A-4A6B-8053-062DCF1F4D35}"/>
-              </a:ext>
-            </a:extLst>
-          </p:cNvPr>
-          <p:cNvPicPr>
-            <a:picLocks noChangeAspect="1"/>
-          </p:cNvPicPr>
-          <p:nvPr/>
-        </p:nvPicPr>
-        <p:blipFill>
-          <a:blip r:embed="rId3"/>
-          <a:stretch>
-            <a:fillRect/>
-          </a:stretch>
-        </p:blipFill>
-        <p:spPr>
-          <a:xfrm>
-            <a:off x="1139092" y="2498423"/>
-            <a:ext cx="2743200" cy="337153"/>
-          </a:xfrm>
-          <a:prstGeom prst="rect">
-            <a:avLst/>
-          </a:prstGeom>
-        </p:spPr>
-      </p:pic>
-    </p:spTree>
-    <p:extLst>
-      <p:ext uri="{BB962C8B-B14F-4D97-AF65-F5344CB8AC3E}">
-        <p14:creationId xmlns:p14="http://schemas.microsoft.com/office/powerpoint/2010/main" val="1733125250"/>
-      </p:ext>
-    </p:extLst>
-  </p:cSld>
-  <p:clrMapOvr>
-    <a:masterClrMapping/>
-  </p:clrMapOvr>
-</p:sld>
-</file>
-
-<file path=ppt/slides/slide7.xml><?xml version="1.0" encoding="utf-8"?>
-<p:sld xmlns:a="http://schemas.openxmlformats.org/drawingml/2006/main" xmlns:r="http://schemas.openxmlformats.org/officeDocument/2006/relationships" xmlns:p="http://schemas.openxmlformats.org/presentationml/2006/main">
-  <p:cSld>
-    <p:spTree>
-      <p:nvGrpSpPr>
-        <p:cNvPr id="1" name=""/>
-        <p:cNvGrpSpPr/>
-        <p:nvPr/>
-      </p:nvGrpSpPr>
-      <p:grpSpPr>
-        <a:xfrm>
-          <a:off x="0" y="0"/>
-          <a:ext cx="0" cy="0"/>
-          <a:chOff x="0" y="0"/>
-          <a:chExt cx="0" cy="0"/>
-        </a:xfrm>
-      </p:grpSpPr>
-      <p:sp>
-        <p:nvSpPr>
-          <p:cNvPr id="2" name="Title 1">
-            <a:extLst>
-              <a:ext uri="{FF2B5EF4-FFF2-40B4-BE49-F238E27FC236}">
                 <a16:creationId xmlns:a16="http://schemas.microsoft.com/office/drawing/2014/main" id="{BE79D0F1-31A8-934B-8486-B9D3C52E0A02}"/>
               </a:ext>
             </a:extLst>
@@ -23720,7 +23425,7 @@
 </p:sld>
 </file>
 
-<file path=ppt/slides/slide8.xml><?xml version="1.0" encoding="utf-8"?>
+<file path=ppt/slides/slide7.xml><?xml version="1.0" encoding="utf-8"?>
 <p:sld xmlns:a="http://schemas.openxmlformats.org/drawingml/2006/main" xmlns:r="http://schemas.openxmlformats.org/officeDocument/2006/relationships" xmlns:p="http://schemas.openxmlformats.org/presentationml/2006/main">
   <p:cSld>
     <p:spTree>
@@ -23886,7 +23591,7 @@
 </p:sld>
 </file>
 
-<file path=ppt/slides/slide9.xml><?xml version="1.0" encoding="utf-8"?>
+<file path=ppt/slides/slide8.xml><?xml version="1.0" encoding="utf-8"?>
 <p:sld xmlns:a="http://schemas.openxmlformats.org/drawingml/2006/main" xmlns:r="http://schemas.openxmlformats.org/officeDocument/2006/relationships" xmlns:p="http://schemas.openxmlformats.org/presentationml/2006/main">
   <p:cSld>
     <p:spTree>
@@ -24087,6 +23792,184 @@
     <p:extLst>
       <p:ext uri="{BB962C8B-B14F-4D97-AF65-F5344CB8AC3E}">
         <p14:creationId xmlns:p14="http://schemas.microsoft.com/office/powerpoint/2010/main" val="2840496418"/>
+      </p:ext>
+    </p:extLst>
+  </p:cSld>
+  <p:clrMapOvr>
+    <a:masterClrMapping/>
+  </p:clrMapOvr>
+</p:sld>
+</file>
+
+<file path=ppt/slides/slide9.xml><?xml version="1.0" encoding="utf-8"?>
+<p:sld xmlns:a="http://schemas.openxmlformats.org/drawingml/2006/main" xmlns:r="http://schemas.openxmlformats.org/officeDocument/2006/relationships" xmlns:p="http://schemas.openxmlformats.org/presentationml/2006/main">
+  <p:cSld>
+    <p:spTree>
+      <p:nvGrpSpPr>
+        <p:cNvPr id="1" name=""/>
+        <p:cNvGrpSpPr/>
+        <p:nvPr/>
+      </p:nvGrpSpPr>
+      <p:grpSpPr>
+        <a:xfrm>
+          <a:off x="0" y="0"/>
+          <a:ext cx="0" cy="0"/>
+          <a:chOff x="0" y="0"/>
+          <a:chExt cx="0" cy="0"/>
+        </a:xfrm>
+      </p:grpSpPr>
+      <p:sp>
+        <p:nvSpPr>
+          <p:cNvPr id="2" name="Title 1">
+            <a:extLst>
+              <a:ext uri="{FF2B5EF4-FFF2-40B4-BE49-F238E27FC236}">
+                <a16:creationId xmlns:a16="http://schemas.microsoft.com/office/drawing/2014/main" id="{089AB04D-874D-0245-A562-02212EE48CA7}"/>
+              </a:ext>
+            </a:extLst>
+          </p:cNvPr>
+          <p:cNvSpPr>
+            <a:spLocks noGrp="1"/>
+          </p:cNvSpPr>
+          <p:nvPr>
+            <p:ph type="title"/>
+          </p:nvPr>
+        </p:nvSpPr>
+        <p:spPr>
+          <a:xfrm>
+            <a:off x="1143000" y="146102"/>
+            <a:ext cx="10515600" cy="1325563"/>
+          </a:xfrm>
+        </p:spPr>
+        <p:txBody>
+          <a:bodyPr/>
+          <a:lstStyle/>
+          <a:p>
+            <a:r>
+              <a:rPr lang="en-US"/>
+              <a:t>lists</a:t>
+            </a:r>
+          </a:p>
+        </p:txBody>
+      </p:sp>
+      <p:sp>
+        <p:nvSpPr>
+          <p:cNvPr id="6" name="Content Placeholder 5">
+            <a:extLst>
+              <a:ext uri="{FF2B5EF4-FFF2-40B4-BE49-F238E27FC236}">
+                <a16:creationId xmlns:a16="http://schemas.microsoft.com/office/drawing/2014/main" id="{FDB60DBF-F433-4057-85ED-960E10BB18C1}"/>
+              </a:ext>
+            </a:extLst>
+          </p:cNvPr>
+          <p:cNvSpPr>
+            <a:spLocks noGrp="1"/>
+          </p:cNvSpPr>
+          <p:nvPr>
+            <p:ph idx="1"/>
+          </p:nvPr>
+        </p:nvSpPr>
+        <p:spPr>
+          <a:xfrm>
+            <a:off x="1143892" y="1495044"/>
+            <a:ext cx="7729728" cy="4802543"/>
+          </a:xfrm>
+        </p:spPr>
+        <p:txBody>
+          <a:bodyPr vert="horz" lIns="91440" tIns="45720" rIns="91440" bIns="45720" rtlCol="0" anchor="t">
+            <a:normAutofit/>
+          </a:bodyPr>
+          <a:lstStyle/>
+          <a:p>
+            <a:r>
+              <a:rPr lang="en-US" dirty="0"/>
+              <a:t>Modifying Elements</a:t>
+            </a:r>
+          </a:p>
+          <a:p>
+            <a:pPr lvl="1"/>
+            <a:r>
+              <a:rPr lang="en-US" dirty="0"/>
+              <a:t>To change an element in a list, assign the new element to the index of the element you want to change</a:t>
+            </a:r>
+          </a:p>
+          <a:p>
+            <a:pPr lvl="2"/>
+            <a:r>
+              <a:rPr lang="en-US" dirty="0">
+                <a:highlight>
+                  <a:srgbClr val="000000"/>
+                </a:highlight>
+              </a:rPr>
+              <a:t>names[0] = 'Amy'   #used to be 'Will'</a:t>
+            </a:r>
+          </a:p>
+          <a:p>
+            <a:r>
+              <a:rPr lang="en-US" dirty="0"/>
+              <a:t>Adding Elements</a:t>
+            </a:r>
+          </a:p>
+          <a:p>
+            <a:pPr lvl="1"/>
+            <a:r>
+              <a:rPr lang="en-US" dirty="0"/>
+              <a:t>.append(element) - Adds element to end of list</a:t>
+            </a:r>
+          </a:p>
+          <a:p>
+            <a:pPr lvl="1"/>
+            <a:r>
+              <a:rPr lang="en-US" dirty="0"/>
+              <a:t>.insert(</a:t>
+            </a:r>
+            <a:r>
+              <a:rPr lang="en-US" dirty="0" err="1"/>
+              <a:t>idx</a:t>
+            </a:r>
+            <a:r>
+              <a:rPr lang="en-US" dirty="0"/>
+              <a:t>, element) - Adds element at desired index while moving elements after index to the right (think current index + 1)</a:t>
+            </a:r>
+          </a:p>
+          <a:p>
+            <a:pPr lvl="1"/>
+            <a:endParaRPr lang="en-US" dirty="0"/>
+          </a:p>
+        </p:txBody>
+      </p:sp>
+      <p:pic>
+        <p:nvPicPr>
+          <p:cNvPr id="4" name="Picture 4" descr="A close up of a sign&#10;&#10;Description automatically generated">
+            <a:extLst>
+              <a:ext uri="{FF2B5EF4-FFF2-40B4-BE49-F238E27FC236}">
+                <a16:creationId xmlns:a16="http://schemas.microsoft.com/office/drawing/2014/main" id="{6E648EE6-D4BA-4C03-9199-CD5E82CDC43C}"/>
+              </a:ext>
+            </a:extLst>
+          </p:cNvPr>
+          <p:cNvPicPr>
+            <a:picLocks noChangeAspect="1"/>
+          </p:cNvPicPr>
+          <p:nvPr/>
+        </p:nvPicPr>
+        <p:blipFill>
+          <a:blip r:embed="rId2"/>
+          <a:stretch>
+            <a:fillRect/>
+          </a:stretch>
+        </p:blipFill>
+        <p:spPr>
+          <a:xfrm>
+            <a:off x="3746810" y="4998089"/>
+            <a:ext cx="5306520" cy="1859911"/>
+          </a:xfrm>
+          <a:prstGeom prst="rect">
+            <a:avLst/>
+          </a:prstGeom>
+        </p:spPr>
+      </p:pic>
+    </p:spTree>
+    <p:extLst>
+      <p:ext uri="{BB962C8B-B14F-4D97-AF65-F5344CB8AC3E}">
+        <p14:creationId xmlns:p14="http://schemas.microsoft.com/office/powerpoint/2010/main" val="1784549319"/>
       </p:ext>
     </p:extLst>
   </p:cSld>
